--- a/public/lessons/year-6-maths/autumn/week-1/solve-place-value-problems/teaching-powerpoint-v1.pptx
+++ b/public/lessons/year-6-maths/autumn/week-1/solve-place-value-problems/teaching-powerpoint-v1.pptx
@@ -2,24 +2,24 @@
 <file path=ppt/presentation.xml><?xml version="1.0" encoding="utf-8"?>
 <p:presentation xmlns:p="http://schemas.openxmlformats.org/presentationml/2006/main">
   <p:sldMasterIdLst>
-    <p:sldMasterId xmlns:r="http://schemas.openxmlformats.org/officeDocument/2006/relationships" id="2147483648" r:id="R3d6aa3c565374f42"/>
+    <p:sldMasterId xmlns:r="http://schemas.openxmlformats.org/officeDocument/2006/relationships" id="2147483648" r:id="R96de4e7bbcb44f55"/>
   </p:sldMasterIdLst>
   <p:notesMasterIdLst>
-    <p:notesMasterId xmlns:r="http://schemas.openxmlformats.org/officeDocument/2006/relationships" r:id="R0e80202113b747ea"/>
+    <p:notesMasterId xmlns:r="http://schemas.openxmlformats.org/officeDocument/2006/relationships" r:id="Rc61bf65b895f4584"/>
   </p:notesMasterIdLst>
   <p:sldIdLst>
-    <p:sldId xmlns:r="http://schemas.openxmlformats.org/officeDocument/2006/relationships" id="256" r:id="R4f255d2283db406e"/>
-    <p:sldId xmlns:r="http://schemas.openxmlformats.org/officeDocument/2006/relationships" id="257" r:id="R87ec322597d844a7"/>
-    <p:sldId xmlns:r="http://schemas.openxmlformats.org/officeDocument/2006/relationships" id="258" r:id="Rd043a6de16584af3"/>
-    <p:sldId xmlns:r="http://schemas.openxmlformats.org/officeDocument/2006/relationships" id="259" r:id="R9e55505e5d654622"/>
-    <p:sldId xmlns:r="http://schemas.openxmlformats.org/officeDocument/2006/relationships" id="260" r:id="Ra807f10f62284c56"/>
-    <p:sldId xmlns:r="http://schemas.openxmlformats.org/officeDocument/2006/relationships" id="261" r:id="R6592bb9fde3e42e6"/>
-    <p:sldId xmlns:r="http://schemas.openxmlformats.org/officeDocument/2006/relationships" id="262" r:id="R43644b53856a43c9"/>
-    <p:sldId xmlns:r="http://schemas.openxmlformats.org/officeDocument/2006/relationships" id="263" r:id="R05b82a5b1fbb4e91"/>
-    <p:sldId xmlns:r="http://schemas.openxmlformats.org/officeDocument/2006/relationships" id="264" r:id="Rffacebe1f77f4da0"/>
-    <p:sldId xmlns:r="http://schemas.openxmlformats.org/officeDocument/2006/relationships" id="265" r:id="Rfb94e552a7804620"/>
-    <p:sldId xmlns:r="http://schemas.openxmlformats.org/officeDocument/2006/relationships" id="266" r:id="R8e827c2594384c10"/>
-    <p:sldId xmlns:r="http://schemas.openxmlformats.org/officeDocument/2006/relationships" id="267" r:id="R1ecc588ec58243ec"/>
+    <p:sldId xmlns:r="http://schemas.openxmlformats.org/officeDocument/2006/relationships" id="256" r:id="Re31436c989b84382"/>
+    <p:sldId xmlns:r="http://schemas.openxmlformats.org/officeDocument/2006/relationships" id="257" r:id="R4aad27fe21614f62"/>
+    <p:sldId xmlns:r="http://schemas.openxmlformats.org/officeDocument/2006/relationships" id="258" r:id="R5ac3922bdc164c2b"/>
+    <p:sldId xmlns:r="http://schemas.openxmlformats.org/officeDocument/2006/relationships" id="259" r:id="R2dbf0676c78f4a1b"/>
+    <p:sldId xmlns:r="http://schemas.openxmlformats.org/officeDocument/2006/relationships" id="260" r:id="Rb2c1bea54cc84382"/>
+    <p:sldId xmlns:r="http://schemas.openxmlformats.org/officeDocument/2006/relationships" id="261" r:id="R27b3dabf7fd74a60"/>
+    <p:sldId xmlns:r="http://schemas.openxmlformats.org/officeDocument/2006/relationships" id="262" r:id="R19183d3ee5be4027"/>
+    <p:sldId xmlns:r="http://schemas.openxmlformats.org/officeDocument/2006/relationships" id="263" r:id="Rbc5250a8a0f74e82"/>
+    <p:sldId xmlns:r="http://schemas.openxmlformats.org/officeDocument/2006/relationships" id="264" r:id="Ra9a9d7272bbc4797"/>
+    <p:sldId xmlns:r="http://schemas.openxmlformats.org/officeDocument/2006/relationships" id="265" r:id="R526a144d0e674ad2"/>
+    <p:sldId xmlns:r="http://schemas.openxmlformats.org/officeDocument/2006/relationships" id="266" r:id="Radd1b59178a1419c"/>
+    <p:sldId xmlns:r="http://schemas.openxmlformats.org/officeDocument/2006/relationships" id="267" r:id="R63222002fb8747f3"/>
   </p:sldIdLst>
   <p:sldSz cx="12192000" cy="6858000"/>
   <p:notesSz cx="6858000" cy="9144000"/>
@@ -873,7 +873,7 @@
           <a:lstStyle xmlns:a="http://schemas.openxmlformats.org/drawingml/2006/main"/>
           <a:p xmlns:a="http://schemas.openxmlformats.org/drawingml/2006/main">
             <a:r>
-              <a:t>I do. Reveal the question, setup and each calculation stage one click at a time. Pupils watch before copying. Model answer: 3,405,455.</a:t>
+              <a:t>I do. Reveal the question, then reveal each mathematical change one click at a time. Point to the numbers and operation that changed before moving to the next line. Final answer: 3,405,455.</a:t>
             </a:r>
           </a:p>
         </p:txBody>
@@ -1291,7 +1291,7 @@
   </p:cSld>
   <p:clrMap bg1="lt1" tx1="dk1" bg2="lt2" tx2="dk2" accent1="accent1" accent2="accent2" accent3="accent3" accent4="accent4" accent5="accent5" accent6="accent6" hlink="hlink" folHlink="folHlink"/>
   <p:sldLayoutIdLst>
-    <p:sldLayoutId xmlns:r="http://schemas.openxmlformats.org/officeDocument/2006/relationships" id="2147483649" r:id="Rfc7787d905fc48f2"/>
+    <p:sldLayoutId xmlns:r="http://schemas.openxmlformats.org/officeDocument/2006/relationships" id="2147483649" r:id="Re5db5778cc744c68"/>
   </p:sldLayoutIdLst>
   <p:txStyles>
     <p:titleStyle>
@@ -1842,7 +1842,7 @@
           <p:cNvPr id="12" name="">
             <a:extLst xmlns:a="http://schemas.openxmlformats.org/drawingml/2006/main">
               <a:ext uri="{FF2B5EF4-FFF2-40B4-BE49-F238E27FC236}">
-                <a16:creationId xmlns:a16="http://schemas.microsoft.com/office/drawing/2014/main" id="{63CFDFBF-26BC-444A-A82B-5DA270C0F594}"/>
+                <a16:creationId xmlns:a16="http://schemas.microsoft.com/office/drawing/2014/main" id="{AD382737-6FAF-4BCB-9FC9-56DCC3136D6C}"/>
               </a:ext>
             </a:extLst>
           </p:cNvPr>
@@ -1874,7 +1874,7 @@
           <p:cNvPr id="2" name="">
             <a:extLst xmlns:a="http://schemas.openxmlformats.org/drawingml/2006/main">
               <a:ext uri="{FF2B5EF4-FFF2-40B4-BE49-F238E27FC236}">
-                <a16:creationId xmlns:a16="http://schemas.microsoft.com/office/drawing/2014/main" id="{992FC672-7F04-4655-B2CE-28A7BD444007}"/>
+                <a16:creationId xmlns:a16="http://schemas.microsoft.com/office/drawing/2014/main" id="{6598D37A-EB67-40A1-BDB7-33178A607CB2}"/>
               </a:ext>
             </a:extLst>
           </p:cNvPr>
@@ -1931,7 +1931,7 @@
           <p:cNvPr id="3" name="">
             <a:extLst xmlns:a="http://schemas.openxmlformats.org/drawingml/2006/main">
               <a:ext uri="{FF2B5EF4-FFF2-40B4-BE49-F238E27FC236}">
-                <a16:creationId xmlns:a16="http://schemas.microsoft.com/office/drawing/2014/main" id="{7BC3B89B-E6AD-42AD-BD01-D110EE70BE21}"/>
+                <a16:creationId xmlns:a16="http://schemas.microsoft.com/office/drawing/2014/main" id="{CC4683D2-6D9D-4B90-8F15-AA6CEEBA73B9}"/>
               </a:ext>
             </a:extLst>
           </p:cNvPr>
@@ -1965,7 +1965,7 @@
           <p:cNvPr id="4" name="">
             <a:extLst xmlns:a="http://schemas.openxmlformats.org/drawingml/2006/main">
               <a:ext uri="{FF2B5EF4-FFF2-40B4-BE49-F238E27FC236}">
-                <a16:creationId xmlns:a16="http://schemas.microsoft.com/office/drawing/2014/main" id="{2CA7263F-898D-4F62-BB48-9CC0BB43E72D}"/>
+                <a16:creationId xmlns:a16="http://schemas.microsoft.com/office/drawing/2014/main" id="{B338027A-D9C2-4B46-ABE1-6B25354A3BA8}"/>
               </a:ext>
             </a:extLst>
           </p:cNvPr>
@@ -2022,7 +2022,7 @@
           <p:cNvPr id="5" name="">
             <a:extLst xmlns:a="http://schemas.openxmlformats.org/drawingml/2006/main">
               <a:ext uri="{FF2B5EF4-FFF2-40B4-BE49-F238E27FC236}">
-                <a16:creationId xmlns:a16="http://schemas.microsoft.com/office/drawing/2014/main" id="{F0715F79-01FC-4AAB-9EDC-3156B60CC71D}"/>
+                <a16:creationId xmlns:a16="http://schemas.microsoft.com/office/drawing/2014/main" id="{F5C78ECA-ADD8-42FA-99FE-246E7974267A}"/>
               </a:ext>
             </a:extLst>
           </p:cNvPr>
@@ -2079,7 +2079,7 @@
           <p:cNvPr id="6" name="">
             <a:extLst xmlns:a="http://schemas.openxmlformats.org/drawingml/2006/main">
               <a:ext uri="{FF2B5EF4-FFF2-40B4-BE49-F238E27FC236}">
-                <a16:creationId xmlns:a16="http://schemas.microsoft.com/office/drawing/2014/main" id="{F915B07E-0856-4EBE-89D9-B5A06CF04D34}"/>
+                <a16:creationId xmlns:a16="http://schemas.microsoft.com/office/drawing/2014/main" id="{136BD789-FD00-4AF0-B86F-90E7533E5694}"/>
               </a:ext>
             </a:extLst>
           </p:cNvPr>
@@ -2113,7 +2113,7 @@
           <p:cNvPr id="7" name="">
             <a:extLst xmlns:a="http://schemas.openxmlformats.org/drawingml/2006/main">
               <a:ext uri="{FF2B5EF4-FFF2-40B4-BE49-F238E27FC236}">
-                <a16:creationId xmlns:a16="http://schemas.microsoft.com/office/drawing/2014/main" id="{AB9343E8-5249-4FC7-A21B-202BAD59FFFD}"/>
+                <a16:creationId xmlns:a16="http://schemas.microsoft.com/office/drawing/2014/main" id="{845547F3-6542-4C86-925B-851A8FA76FEB}"/>
               </a:ext>
             </a:extLst>
           </p:cNvPr>
@@ -2170,7 +2170,7 @@
           <p:cNvPr id="8" name="">
             <a:extLst xmlns:a="http://schemas.openxmlformats.org/drawingml/2006/main">
               <a:ext uri="{FF2B5EF4-FFF2-40B4-BE49-F238E27FC236}">
-                <a16:creationId xmlns:a16="http://schemas.microsoft.com/office/drawing/2014/main" id="{E331768E-B830-42F7-88FA-734F88BF6FA3}"/>
+                <a16:creationId xmlns:a16="http://schemas.microsoft.com/office/drawing/2014/main" id="{EBE21530-6AC0-4766-B55D-5DDA1E54AB40}"/>
               </a:ext>
             </a:extLst>
           </p:cNvPr>
@@ -2227,7 +2227,7 @@
           <p:cNvPr id="9" name="">
             <a:extLst xmlns:a="http://schemas.openxmlformats.org/drawingml/2006/main">
               <a:ext uri="{FF2B5EF4-FFF2-40B4-BE49-F238E27FC236}">
-                <a16:creationId xmlns:a16="http://schemas.microsoft.com/office/drawing/2014/main" id="{CC2FD2AD-C6B2-4C72-B1CF-532F403EC0B6}"/>
+                <a16:creationId xmlns:a16="http://schemas.microsoft.com/office/drawing/2014/main" id="{6C01895F-9740-48AC-94E7-DB34A1526202}"/>
               </a:ext>
             </a:extLst>
           </p:cNvPr>
@@ -2284,7 +2284,7 @@
           <p:cNvPr id="10" name="">
             <a:extLst xmlns:a="http://schemas.openxmlformats.org/drawingml/2006/main">
               <a:ext uri="{FF2B5EF4-FFF2-40B4-BE49-F238E27FC236}">
-                <a16:creationId xmlns:a16="http://schemas.microsoft.com/office/drawing/2014/main" id="{C28BB000-EA0E-4A86-9369-6EF808C537DA}"/>
+                <a16:creationId xmlns:a16="http://schemas.microsoft.com/office/drawing/2014/main" id="{301B6975-746E-4153-A385-F73E78F55D07}"/>
               </a:ext>
             </a:extLst>
           </p:cNvPr>
@@ -2341,7 +2341,7 @@
           <p:cNvPr id="11" name="">
             <a:extLst xmlns:a="http://schemas.openxmlformats.org/drawingml/2006/main">
               <a:ext uri="{FF2B5EF4-FFF2-40B4-BE49-F238E27FC236}">
-                <a16:creationId xmlns:a16="http://schemas.microsoft.com/office/drawing/2014/main" id="{F0F48333-AE64-46E8-B31F-8C9B078D6864}"/>
+                <a16:creationId xmlns:a16="http://schemas.microsoft.com/office/drawing/2014/main" id="{4B509D12-DB2C-46C7-A8BB-8BB985CA75BD}"/>
               </a:ext>
             </a:extLst>
           </p:cNvPr>
@@ -2396,7 +2396,7 @@
     </p:spTree>
     <p:extLst>
       <p:ext uri="{BB962C8B-B14F-4D97-AF65-F5344CB8AC3E}">
-        <p14:creationId xmlns:p14="http://schemas.microsoft.com/office/powerpoint/2010/main" val="80372057"/>
+        <p14:creationId xmlns:p14="http://schemas.microsoft.com/office/powerpoint/2010/main" val="1067122837"/>
       </p:ext>
     </p:extLst>
   </p:cSld>
@@ -2427,7 +2427,7 @@
           <p:cNvPr id="14" name="">
             <a:extLst xmlns:a="http://schemas.openxmlformats.org/drawingml/2006/main">
               <a:ext uri="{FF2B5EF4-FFF2-40B4-BE49-F238E27FC236}">
-                <a16:creationId xmlns:a16="http://schemas.microsoft.com/office/drawing/2014/main" id="{192325DA-004B-46C8-BDBE-2C4C9B68198C}"/>
+                <a16:creationId xmlns:a16="http://schemas.microsoft.com/office/drawing/2014/main" id="{AFCB9578-E6FE-4856-B29D-0FEA38271B9A}"/>
               </a:ext>
             </a:extLst>
           </p:cNvPr>
@@ -2459,7 +2459,7 @@
           <p:cNvPr id="2" name="">
             <a:extLst xmlns:a="http://schemas.openxmlformats.org/drawingml/2006/main">
               <a:ext uri="{FF2B5EF4-FFF2-40B4-BE49-F238E27FC236}">
-                <a16:creationId xmlns:a16="http://schemas.microsoft.com/office/drawing/2014/main" id="{8786939D-932F-49A9-9AC8-EE93F3975BF1}"/>
+                <a16:creationId xmlns:a16="http://schemas.microsoft.com/office/drawing/2014/main" id="{F9D49D46-A4E6-4D01-896C-4F72A4C7E064}"/>
               </a:ext>
             </a:extLst>
           </p:cNvPr>
@@ -2516,7 +2516,7 @@
           <p:cNvPr id="3" name="">
             <a:extLst xmlns:a="http://schemas.openxmlformats.org/drawingml/2006/main">
               <a:ext uri="{FF2B5EF4-FFF2-40B4-BE49-F238E27FC236}">
-                <a16:creationId xmlns:a16="http://schemas.microsoft.com/office/drawing/2014/main" id="{251845A2-B412-4A93-97A8-A2769197743E}"/>
+                <a16:creationId xmlns:a16="http://schemas.microsoft.com/office/drawing/2014/main" id="{752F4275-58B0-43BC-AD7D-4B297506C632}"/>
               </a:ext>
             </a:extLst>
           </p:cNvPr>
@@ -2548,7 +2548,7 @@
           <p:cNvPr id="4" name="">
             <a:extLst xmlns:a="http://schemas.openxmlformats.org/drawingml/2006/main">
               <a:ext uri="{FF2B5EF4-FFF2-40B4-BE49-F238E27FC236}">
-                <a16:creationId xmlns:a16="http://schemas.microsoft.com/office/drawing/2014/main" id="{EB52C517-B269-479F-8D59-FD35F164D2D2}"/>
+                <a16:creationId xmlns:a16="http://schemas.microsoft.com/office/drawing/2014/main" id="{0F30644C-20C6-4236-976C-0F0CEB922179}"/>
               </a:ext>
             </a:extLst>
           </p:cNvPr>
@@ -2605,7 +2605,7 @@
           <p:cNvPr id="5" name="">
             <a:extLst xmlns:a="http://schemas.openxmlformats.org/drawingml/2006/main">
               <a:ext uri="{FF2B5EF4-FFF2-40B4-BE49-F238E27FC236}">
-                <a16:creationId xmlns:a16="http://schemas.microsoft.com/office/drawing/2014/main" id="{08C62585-4C40-4467-B3D3-FC2C9448F914}"/>
+                <a16:creationId xmlns:a16="http://schemas.microsoft.com/office/drawing/2014/main" id="{DD6EC3B9-2869-4A66-AACA-EA181CD9D7E4}"/>
               </a:ext>
             </a:extLst>
           </p:cNvPr>
@@ -2662,7 +2662,7 @@
           <p:cNvPr id="6" name="">
             <a:extLst xmlns:a="http://schemas.openxmlformats.org/drawingml/2006/main">
               <a:ext uri="{FF2B5EF4-FFF2-40B4-BE49-F238E27FC236}">
-                <a16:creationId xmlns:a16="http://schemas.microsoft.com/office/drawing/2014/main" id="{EF83AC05-5C3A-4991-BD44-546D6BF70729}"/>
+                <a16:creationId xmlns:a16="http://schemas.microsoft.com/office/drawing/2014/main" id="{EDC7B3B3-4AE7-499D-B6D4-9D3F118ED9C2}"/>
               </a:ext>
             </a:extLst>
           </p:cNvPr>
@@ -2719,7 +2719,7 @@
           <p:cNvPr id="7" name="">
             <a:extLst xmlns:a="http://schemas.openxmlformats.org/drawingml/2006/main">
               <a:ext uri="{FF2B5EF4-FFF2-40B4-BE49-F238E27FC236}">
-                <a16:creationId xmlns:a16="http://schemas.microsoft.com/office/drawing/2014/main" id="{B35B22F6-3215-41CA-8C9A-54775AE57E38}"/>
+                <a16:creationId xmlns:a16="http://schemas.microsoft.com/office/drawing/2014/main" id="{2912D80E-A992-4900-8F31-6DF75CC90828}"/>
               </a:ext>
             </a:extLst>
           </p:cNvPr>
@@ -2751,7 +2751,7 @@
           <p:cNvPr id="8" name="">
             <a:extLst xmlns:a="http://schemas.openxmlformats.org/drawingml/2006/main">
               <a:ext uri="{FF2B5EF4-FFF2-40B4-BE49-F238E27FC236}">
-                <a16:creationId xmlns:a16="http://schemas.microsoft.com/office/drawing/2014/main" id="{C4BB7F0A-6F0C-453B-BE38-2FD3BA8158C5}"/>
+                <a16:creationId xmlns:a16="http://schemas.microsoft.com/office/drawing/2014/main" id="{85726617-5B8F-4932-8820-194D8D4D454A}"/>
               </a:ext>
             </a:extLst>
           </p:cNvPr>
@@ -2808,7 +2808,7 @@
           <p:cNvPr id="9" name="">
             <a:extLst xmlns:a="http://schemas.openxmlformats.org/drawingml/2006/main">
               <a:ext uri="{FF2B5EF4-FFF2-40B4-BE49-F238E27FC236}">
-                <a16:creationId xmlns:a16="http://schemas.microsoft.com/office/drawing/2014/main" id="{BD12E07A-2821-4009-93F9-10C22DB0AE16}"/>
+                <a16:creationId xmlns:a16="http://schemas.microsoft.com/office/drawing/2014/main" id="{A592EC4E-6E56-4C11-97B5-5F66208D0BF8}"/>
               </a:ext>
             </a:extLst>
           </p:cNvPr>
@@ -2865,7 +2865,7 @@
           <p:cNvPr id="10" name="">
             <a:extLst xmlns:a="http://schemas.openxmlformats.org/drawingml/2006/main">
               <a:ext uri="{FF2B5EF4-FFF2-40B4-BE49-F238E27FC236}">
-                <a16:creationId xmlns:a16="http://schemas.microsoft.com/office/drawing/2014/main" id="{80185552-E7B9-4B55-BDBE-019FC0EBE040}"/>
+                <a16:creationId xmlns:a16="http://schemas.microsoft.com/office/drawing/2014/main" id="{3E282A38-C973-47B7-A987-756FF1B5DEBE}"/>
               </a:ext>
             </a:extLst>
           </p:cNvPr>
@@ -2922,7 +2922,7 @@
           <p:cNvPr id="11" name="">
             <a:extLst xmlns:a="http://schemas.openxmlformats.org/drawingml/2006/main">
               <a:ext uri="{FF2B5EF4-FFF2-40B4-BE49-F238E27FC236}">
-                <a16:creationId xmlns:a16="http://schemas.microsoft.com/office/drawing/2014/main" id="{DBBB1251-76E6-47D5-A964-0B7F3E4DFF73}"/>
+                <a16:creationId xmlns:a16="http://schemas.microsoft.com/office/drawing/2014/main" id="{17845920-C28F-4175-8B98-5F3997ACA852}"/>
               </a:ext>
             </a:extLst>
           </p:cNvPr>
@@ -2979,7 +2979,7 @@
           <p:cNvPr id="12" name="">
             <a:extLst xmlns:a="http://schemas.openxmlformats.org/drawingml/2006/main">
               <a:ext uri="{FF2B5EF4-FFF2-40B4-BE49-F238E27FC236}">
-                <a16:creationId xmlns:a16="http://schemas.microsoft.com/office/drawing/2014/main" id="{09FD3673-81E5-468E-8655-840D093EE43A}"/>
+                <a16:creationId xmlns:a16="http://schemas.microsoft.com/office/drawing/2014/main" id="{C8606C13-5FF6-4F6A-9077-47E209795F19}"/>
               </a:ext>
             </a:extLst>
           </p:cNvPr>
@@ -3036,7 +3036,7 @@
           <p:cNvPr id="13" name="">
             <a:extLst xmlns:a="http://schemas.openxmlformats.org/drawingml/2006/main">
               <a:ext uri="{FF2B5EF4-FFF2-40B4-BE49-F238E27FC236}">
-                <a16:creationId xmlns:a16="http://schemas.microsoft.com/office/drawing/2014/main" id="{6E435717-B23C-44F0-8926-490CFDC2C853}"/>
+                <a16:creationId xmlns:a16="http://schemas.microsoft.com/office/drawing/2014/main" id="{73BDD144-00C6-497D-B964-0C213CD553EC}"/>
               </a:ext>
             </a:extLst>
           </p:cNvPr>
@@ -3091,7 +3091,7 @@
     </p:spTree>
     <p:extLst>
       <p:ext uri="{BB962C8B-B14F-4D97-AF65-F5344CB8AC3E}">
-        <p14:creationId xmlns:p14="http://schemas.microsoft.com/office/powerpoint/2010/main" val="2077798164"/>
+        <p14:creationId xmlns:p14="http://schemas.microsoft.com/office/powerpoint/2010/main" val="280029944"/>
       </p:ext>
     </p:extLst>
   </p:cSld>
@@ -3292,7 +3292,7 @@
           <p:cNvPr id="19" name="">
             <a:extLst xmlns:a="http://schemas.openxmlformats.org/drawingml/2006/main">
               <a:ext uri="{FF2B5EF4-FFF2-40B4-BE49-F238E27FC236}">
-                <a16:creationId xmlns:a16="http://schemas.microsoft.com/office/drawing/2014/main" id="{D97D7EC4-8950-436B-86F2-31846ABE3BEA}"/>
+                <a16:creationId xmlns:a16="http://schemas.microsoft.com/office/drawing/2014/main" id="{B8B37E92-6946-4402-9424-075F0CA5941E}"/>
               </a:ext>
             </a:extLst>
           </p:cNvPr>
@@ -3324,7 +3324,7 @@
           <p:cNvPr id="2" name="">
             <a:extLst xmlns:a="http://schemas.openxmlformats.org/drawingml/2006/main">
               <a:ext uri="{FF2B5EF4-FFF2-40B4-BE49-F238E27FC236}">
-                <a16:creationId xmlns:a16="http://schemas.microsoft.com/office/drawing/2014/main" id="{92342D6B-6494-4075-BA61-838A4D98A056}"/>
+                <a16:creationId xmlns:a16="http://schemas.microsoft.com/office/drawing/2014/main" id="{046AAC65-7570-4E4D-8067-E7920D28265E}"/>
               </a:ext>
             </a:extLst>
           </p:cNvPr>
@@ -3381,7 +3381,7 @@
           <p:cNvPr id="3" name="">
             <a:extLst xmlns:a="http://schemas.openxmlformats.org/drawingml/2006/main">
               <a:ext uri="{FF2B5EF4-FFF2-40B4-BE49-F238E27FC236}">
-                <a16:creationId xmlns:a16="http://schemas.microsoft.com/office/drawing/2014/main" id="{D2335FE6-8492-4719-AEE0-0ED7B878F0A7}"/>
+                <a16:creationId xmlns:a16="http://schemas.microsoft.com/office/drawing/2014/main" id="{8CD8320B-5762-4053-BAC2-0A4FE04C3222}"/>
               </a:ext>
             </a:extLst>
           </p:cNvPr>
@@ -3413,7 +3413,7 @@
           <p:cNvPr id="4" name="">
             <a:extLst xmlns:a="http://schemas.openxmlformats.org/drawingml/2006/main">
               <a:ext uri="{FF2B5EF4-FFF2-40B4-BE49-F238E27FC236}">
-                <a16:creationId xmlns:a16="http://schemas.microsoft.com/office/drawing/2014/main" id="{95EF2FEA-B5A6-4B95-9B5E-2B1221B75A61}"/>
+                <a16:creationId xmlns:a16="http://schemas.microsoft.com/office/drawing/2014/main" id="{B34899CB-F73B-4722-85F7-EF89102E841A}"/>
               </a:ext>
             </a:extLst>
           </p:cNvPr>
@@ -3470,7 +3470,7 @@
           <p:cNvPr id="5" name="">
             <a:extLst xmlns:a="http://schemas.openxmlformats.org/drawingml/2006/main">
               <a:ext uri="{FF2B5EF4-FFF2-40B4-BE49-F238E27FC236}">
-                <a16:creationId xmlns:a16="http://schemas.microsoft.com/office/drawing/2014/main" id="{2D141050-1B23-4280-82B9-59C8C17A1748}"/>
+                <a16:creationId xmlns:a16="http://schemas.microsoft.com/office/drawing/2014/main" id="{8E3163ED-F7FC-48FC-9969-2C9C7CA64C21}"/>
               </a:ext>
             </a:extLst>
           </p:cNvPr>
@@ -3527,7 +3527,7 @@
           <p:cNvPr id="6" name="">
             <a:extLst xmlns:a="http://schemas.openxmlformats.org/drawingml/2006/main">
               <a:ext uri="{FF2B5EF4-FFF2-40B4-BE49-F238E27FC236}">
-                <a16:creationId xmlns:a16="http://schemas.microsoft.com/office/drawing/2014/main" id="{2DFBB309-3201-4F3F-AC96-FA8F275009E3}"/>
+                <a16:creationId xmlns:a16="http://schemas.microsoft.com/office/drawing/2014/main" id="{8E856CDD-06D9-4766-9F25-7B654AE5082B}"/>
               </a:ext>
             </a:extLst>
           </p:cNvPr>
@@ -3584,7 +3584,7 @@
           <p:cNvPr id="7" name="">
             <a:extLst xmlns:a="http://schemas.openxmlformats.org/drawingml/2006/main">
               <a:ext uri="{FF2B5EF4-FFF2-40B4-BE49-F238E27FC236}">
-                <a16:creationId xmlns:a16="http://schemas.microsoft.com/office/drawing/2014/main" id="{6B772DE2-1DDE-4E3B-95D9-645FC237DE1C}"/>
+                <a16:creationId xmlns:a16="http://schemas.microsoft.com/office/drawing/2014/main" id="{44032FAC-AF4A-4297-A0F3-01B9FAAA881A}"/>
               </a:ext>
             </a:extLst>
           </p:cNvPr>
@@ -3616,7 +3616,7 @@
           <p:cNvPr id="8" name="">
             <a:extLst xmlns:a="http://schemas.openxmlformats.org/drawingml/2006/main">
               <a:ext uri="{FF2B5EF4-FFF2-40B4-BE49-F238E27FC236}">
-                <a16:creationId xmlns:a16="http://schemas.microsoft.com/office/drawing/2014/main" id="{47F26180-1D59-48B7-AE3A-B1DA23252224}"/>
+                <a16:creationId xmlns:a16="http://schemas.microsoft.com/office/drawing/2014/main" id="{4C1D67CC-E162-486A-8A12-CE461435FB2C}"/>
               </a:ext>
             </a:extLst>
           </p:cNvPr>
@@ -3673,7 +3673,7 @@
           <p:cNvPr id="9" name="">
             <a:extLst xmlns:a="http://schemas.openxmlformats.org/drawingml/2006/main">
               <a:ext uri="{FF2B5EF4-FFF2-40B4-BE49-F238E27FC236}">
-                <a16:creationId xmlns:a16="http://schemas.microsoft.com/office/drawing/2014/main" id="{3FB5BFE7-A374-40DA-A981-207AD21DA1C7}"/>
+                <a16:creationId xmlns:a16="http://schemas.microsoft.com/office/drawing/2014/main" id="{40F234E9-F4F0-47A5-A68E-00448B2D4BC7}"/>
               </a:ext>
             </a:extLst>
           </p:cNvPr>
@@ -3730,7 +3730,7 @@
           <p:cNvPr id="10" name="">
             <a:extLst xmlns:a="http://schemas.openxmlformats.org/drawingml/2006/main">
               <a:ext uri="{FF2B5EF4-FFF2-40B4-BE49-F238E27FC236}">
-                <a16:creationId xmlns:a16="http://schemas.microsoft.com/office/drawing/2014/main" id="{FB051B86-2BA9-487A-B7F4-144D662488C9}"/>
+                <a16:creationId xmlns:a16="http://schemas.microsoft.com/office/drawing/2014/main" id="{A94FCBB8-6797-457A-896F-CC764F781E83}"/>
               </a:ext>
             </a:extLst>
           </p:cNvPr>
@@ -3787,7 +3787,7 @@
           <p:cNvPr id="11" name="">
             <a:extLst xmlns:a="http://schemas.openxmlformats.org/drawingml/2006/main">
               <a:ext uri="{FF2B5EF4-FFF2-40B4-BE49-F238E27FC236}">
-                <a16:creationId xmlns:a16="http://schemas.microsoft.com/office/drawing/2014/main" id="{78F7E2F3-A128-4ECB-9268-05678B6A40CE}"/>
+                <a16:creationId xmlns:a16="http://schemas.microsoft.com/office/drawing/2014/main" id="{34A6C9E5-BE3C-418D-8527-BD19D7F48CAB}"/>
               </a:ext>
             </a:extLst>
           </p:cNvPr>
@@ -3821,7 +3821,7 @@
           <p:cNvPr id="12" name="">
             <a:extLst xmlns:a="http://schemas.openxmlformats.org/drawingml/2006/main">
               <a:ext uri="{FF2B5EF4-FFF2-40B4-BE49-F238E27FC236}">
-                <a16:creationId xmlns:a16="http://schemas.microsoft.com/office/drawing/2014/main" id="{F989BE10-F7FF-46B9-BE9E-94FCB18EB51B}"/>
+                <a16:creationId xmlns:a16="http://schemas.microsoft.com/office/drawing/2014/main" id="{A03262A3-399F-483D-8695-001846B47658}"/>
               </a:ext>
             </a:extLst>
           </p:cNvPr>
@@ -3878,7 +3878,7 @@
           <p:cNvPr id="13" name="">
             <a:extLst xmlns:a="http://schemas.openxmlformats.org/drawingml/2006/main">
               <a:ext uri="{FF2B5EF4-FFF2-40B4-BE49-F238E27FC236}">
-                <a16:creationId xmlns:a16="http://schemas.microsoft.com/office/drawing/2014/main" id="{3FBDD464-34FD-4BA8-8DDF-4836647297F0}"/>
+                <a16:creationId xmlns:a16="http://schemas.microsoft.com/office/drawing/2014/main" id="{3A008E41-CBEA-4B5C-84B4-015C2E87F2BD}"/>
               </a:ext>
             </a:extLst>
           </p:cNvPr>
@@ -3935,7 +3935,7 @@
           <p:cNvPr id="14" name="">
             <a:extLst xmlns:a="http://schemas.openxmlformats.org/drawingml/2006/main">
               <a:ext uri="{FF2B5EF4-FFF2-40B4-BE49-F238E27FC236}">
-                <a16:creationId xmlns:a16="http://schemas.microsoft.com/office/drawing/2014/main" id="{78F9EF39-EA67-49CD-AB8F-02900642E7BE}"/>
+                <a16:creationId xmlns:a16="http://schemas.microsoft.com/office/drawing/2014/main" id="{A4BFD200-6993-42F0-978E-D0D2E61EBF76}"/>
               </a:ext>
             </a:extLst>
           </p:cNvPr>
@@ -3992,7 +3992,7 @@
           <p:cNvPr id="15" name="">
             <a:extLst xmlns:a="http://schemas.openxmlformats.org/drawingml/2006/main">
               <a:ext uri="{FF2B5EF4-FFF2-40B4-BE49-F238E27FC236}">
-                <a16:creationId xmlns:a16="http://schemas.microsoft.com/office/drawing/2014/main" id="{595BA9E8-5064-45A6-B2FA-2B265B481742}"/>
+                <a16:creationId xmlns:a16="http://schemas.microsoft.com/office/drawing/2014/main" id="{FF8C7822-4CC8-4DD7-9A0C-4CB5E39977FB}"/>
               </a:ext>
             </a:extLst>
           </p:cNvPr>
@@ -4026,7 +4026,7 @@
           <p:cNvPr id="16" name="">
             <a:extLst xmlns:a="http://schemas.openxmlformats.org/drawingml/2006/main">
               <a:ext uri="{FF2B5EF4-FFF2-40B4-BE49-F238E27FC236}">
-                <a16:creationId xmlns:a16="http://schemas.microsoft.com/office/drawing/2014/main" id="{3CE369ED-8BC9-4487-A952-5F6E655A3E3B}"/>
+                <a16:creationId xmlns:a16="http://schemas.microsoft.com/office/drawing/2014/main" id="{77BF12ED-0A11-4CAC-8023-7726538B7674}"/>
               </a:ext>
             </a:extLst>
           </p:cNvPr>
@@ -4083,7 +4083,7 @@
           <p:cNvPr id="17" name="">
             <a:extLst xmlns:a="http://schemas.openxmlformats.org/drawingml/2006/main">
               <a:ext uri="{FF2B5EF4-FFF2-40B4-BE49-F238E27FC236}">
-                <a16:creationId xmlns:a16="http://schemas.microsoft.com/office/drawing/2014/main" id="{49643F19-E7EC-4AD8-B760-AA2E4D69FE71}"/>
+                <a16:creationId xmlns:a16="http://schemas.microsoft.com/office/drawing/2014/main" id="{4E19E6E2-7F28-4538-8C1D-F5060715584F}"/>
               </a:ext>
             </a:extLst>
           </p:cNvPr>
@@ -4140,7 +4140,7 @@
           <p:cNvPr id="18" name="">
             <a:extLst xmlns:a="http://schemas.openxmlformats.org/drawingml/2006/main">
               <a:ext uri="{FF2B5EF4-FFF2-40B4-BE49-F238E27FC236}">
-                <a16:creationId xmlns:a16="http://schemas.microsoft.com/office/drawing/2014/main" id="{7B107543-C98D-4938-B545-54D47D7CD66D}"/>
+                <a16:creationId xmlns:a16="http://schemas.microsoft.com/office/drawing/2014/main" id="{FD3FF128-810D-4C32-BD40-541EBAD742EA}"/>
               </a:ext>
             </a:extLst>
           </p:cNvPr>
@@ -4195,7 +4195,7 @@
     </p:spTree>
     <p:extLst>
       <p:ext uri="{BB962C8B-B14F-4D97-AF65-F5344CB8AC3E}">
-        <p14:creationId xmlns:p14="http://schemas.microsoft.com/office/powerpoint/2010/main" val="1304146555"/>
+        <p14:creationId xmlns:p14="http://schemas.microsoft.com/office/powerpoint/2010/main" val="2034143226"/>
       </p:ext>
     </p:extLst>
   </p:cSld>
@@ -4350,7 +4350,7 @@
           <p:cNvPr id="23" name="">
             <a:extLst xmlns:a="http://schemas.openxmlformats.org/drawingml/2006/main">
               <a:ext uri="{FF2B5EF4-FFF2-40B4-BE49-F238E27FC236}">
-                <a16:creationId xmlns:a16="http://schemas.microsoft.com/office/drawing/2014/main" id="{F2D3D2CB-8AB1-441F-8C50-1AA2530C01F7}"/>
+                <a16:creationId xmlns:a16="http://schemas.microsoft.com/office/drawing/2014/main" id="{DFE875AF-0DEF-4F93-8481-D650A5D4A83B}"/>
               </a:ext>
             </a:extLst>
           </p:cNvPr>
@@ -4382,7 +4382,7 @@
           <p:cNvPr id="2" name="">
             <a:extLst xmlns:a="http://schemas.openxmlformats.org/drawingml/2006/main">
               <a:ext uri="{FF2B5EF4-FFF2-40B4-BE49-F238E27FC236}">
-                <a16:creationId xmlns:a16="http://schemas.microsoft.com/office/drawing/2014/main" id="{8FB715E6-B2BE-4702-97EA-7D72AB90ACE5}"/>
+                <a16:creationId xmlns:a16="http://schemas.microsoft.com/office/drawing/2014/main" id="{5CABF820-13CD-4B0E-A3E2-FF2B8698591D}"/>
               </a:ext>
             </a:extLst>
           </p:cNvPr>
@@ -4439,7 +4439,7 @@
           <p:cNvPr id="3" name="">
             <a:extLst xmlns:a="http://schemas.openxmlformats.org/drawingml/2006/main">
               <a:ext uri="{FF2B5EF4-FFF2-40B4-BE49-F238E27FC236}">
-                <a16:creationId xmlns:a16="http://schemas.microsoft.com/office/drawing/2014/main" id="{F96F7869-F9C5-43AE-8A77-985DBBD8C6A7}"/>
+                <a16:creationId xmlns:a16="http://schemas.microsoft.com/office/drawing/2014/main" id="{160B4C0E-FC88-4803-9586-16B9C0D4F14A}"/>
               </a:ext>
             </a:extLst>
           </p:cNvPr>
@@ -4471,7 +4471,7 @@
           <p:cNvPr id="4" name="">
             <a:extLst xmlns:a="http://schemas.openxmlformats.org/drawingml/2006/main">
               <a:ext uri="{FF2B5EF4-FFF2-40B4-BE49-F238E27FC236}">
-                <a16:creationId xmlns:a16="http://schemas.microsoft.com/office/drawing/2014/main" id="{46400D60-2BEC-46AB-B37B-49C6D9AAF405}"/>
+                <a16:creationId xmlns:a16="http://schemas.microsoft.com/office/drawing/2014/main" id="{67685FBD-F89A-48BF-9BA7-8483639D1A38}"/>
               </a:ext>
             </a:extLst>
           </p:cNvPr>
@@ -4528,7 +4528,7 @@
           <p:cNvPr id="5" name="">
             <a:extLst xmlns:a="http://schemas.openxmlformats.org/drawingml/2006/main">
               <a:ext uri="{FF2B5EF4-FFF2-40B4-BE49-F238E27FC236}">
-                <a16:creationId xmlns:a16="http://schemas.microsoft.com/office/drawing/2014/main" id="{61FF35DB-93DD-4659-B590-8ED1952D757E}"/>
+                <a16:creationId xmlns:a16="http://schemas.microsoft.com/office/drawing/2014/main" id="{B29FA0AE-494A-4EF7-AA41-392382C29E4D}"/>
               </a:ext>
             </a:extLst>
           </p:cNvPr>
@@ -4585,7 +4585,7 @@
           <p:cNvPr id="6" name="">
             <a:extLst xmlns:a="http://schemas.openxmlformats.org/drawingml/2006/main">
               <a:ext uri="{FF2B5EF4-FFF2-40B4-BE49-F238E27FC236}">
-                <a16:creationId xmlns:a16="http://schemas.microsoft.com/office/drawing/2014/main" id="{DF9F611F-0D19-4B1D-AA1C-754CF26CEAB3}"/>
+                <a16:creationId xmlns:a16="http://schemas.microsoft.com/office/drawing/2014/main" id="{4173F090-B07C-4268-89D0-80284611BE89}"/>
               </a:ext>
             </a:extLst>
           </p:cNvPr>
@@ -4642,7 +4642,7 @@
           <p:cNvPr id="7" name="">
             <a:extLst xmlns:a="http://schemas.openxmlformats.org/drawingml/2006/main">
               <a:ext uri="{FF2B5EF4-FFF2-40B4-BE49-F238E27FC236}">
-                <a16:creationId xmlns:a16="http://schemas.microsoft.com/office/drawing/2014/main" id="{4F309048-85B8-440A-831F-5A74CB23F264}"/>
+                <a16:creationId xmlns:a16="http://schemas.microsoft.com/office/drawing/2014/main" id="{60519159-DB74-47CF-98F8-BD70CA4310BC}"/>
               </a:ext>
             </a:extLst>
           </p:cNvPr>
@@ -4674,7 +4674,7 @@
           <p:cNvPr id="8" name="">
             <a:extLst xmlns:a="http://schemas.openxmlformats.org/drawingml/2006/main">
               <a:ext uri="{FF2B5EF4-FFF2-40B4-BE49-F238E27FC236}">
-                <a16:creationId xmlns:a16="http://schemas.microsoft.com/office/drawing/2014/main" id="{9EC54DF1-14A1-4FD8-843C-422C61A3E35E}"/>
+                <a16:creationId xmlns:a16="http://schemas.microsoft.com/office/drawing/2014/main" id="{BE71A525-CCD9-4BA8-9708-1A1C50480C24}"/>
               </a:ext>
             </a:extLst>
           </p:cNvPr>
@@ -4731,7 +4731,7 @@
           <p:cNvPr id="9" name="">
             <a:extLst xmlns:a="http://schemas.openxmlformats.org/drawingml/2006/main">
               <a:ext uri="{FF2B5EF4-FFF2-40B4-BE49-F238E27FC236}">
-                <a16:creationId xmlns:a16="http://schemas.microsoft.com/office/drawing/2014/main" id="{58E89F6D-13CC-4D61-AC60-8ED81A996D5D}"/>
+                <a16:creationId xmlns:a16="http://schemas.microsoft.com/office/drawing/2014/main" id="{AE35B88C-6B1E-40ED-9D77-2A09BCA79345}"/>
               </a:ext>
             </a:extLst>
           </p:cNvPr>
@@ -4788,7 +4788,7 @@
           <p:cNvPr id="10" name="">
             <a:extLst xmlns:a="http://schemas.openxmlformats.org/drawingml/2006/main">
               <a:ext uri="{FF2B5EF4-FFF2-40B4-BE49-F238E27FC236}">
-                <a16:creationId xmlns:a16="http://schemas.microsoft.com/office/drawing/2014/main" id="{72A8F6B9-641D-46BF-A578-CE2F5E0F4DDF}"/>
+                <a16:creationId xmlns:a16="http://schemas.microsoft.com/office/drawing/2014/main" id="{9A813AFA-66F6-4F77-AFD0-CDCE6BCE6C68}"/>
               </a:ext>
             </a:extLst>
           </p:cNvPr>
@@ -4822,7 +4822,7 @@
           <p:cNvPr id="11" name="">
             <a:extLst xmlns:a="http://schemas.openxmlformats.org/drawingml/2006/main">
               <a:ext uri="{FF2B5EF4-FFF2-40B4-BE49-F238E27FC236}">
-                <a16:creationId xmlns:a16="http://schemas.microsoft.com/office/drawing/2014/main" id="{9034ED6B-2D35-4FFD-A04A-ACECFC594159}"/>
+                <a16:creationId xmlns:a16="http://schemas.microsoft.com/office/drawing/2014/main" id="{D5B4E58A-D83F-4077-A283-77FD2AAB440A}"/>
               </a:ext>
             </a:extLst>
           </p:cNvPr>
@@ -4854,7 +4854,7 @@
           <p:cNvPr id="12" name="">
             <a:extLst xmlns:a="http://schemas.openxmlformats.org/drawingml/2006/main">
               <a:ext uri="{FF2B5EF4-FFF2-40B4-BE49-F238E27FC236}">
-                <a16:creationId xmlns:a16="http://schemas.microsoft.com/office/drawing/2014/main" id="{5294AD80-1A01-412E-8DE2-8233B4FAA767}"/>
+                <a16:creationId xmlns:a16="http://schemas.microsoft.com/office/drawing/2014/main" id="{A25A72EB-B34A-43D2-BD32-742A0B325AB8}"/>
               </a:ext>
             </a:extLst>
           </p:cNvPr>
@@ -4911,7 +4911,7 @@
           <p:cNvPr id="13" name="">
             <a:extLst xmlns:a="http://schemas.openxmlformats.org/drawingml/2006/main">
               <a:ext uri="{FF2B5EF4-FFF2-40B4-BE49-F238E27FC236}">
-                <a16:creationId xmlns:a16="http://schemas.microsoft.com/office/drawing/2014/main" id="{EBACDDB1-14A7-424D-9FC2-F3A814A604BF}"/>
+                <a16:creationId xmlns:a16="http://schemas.microsoft.com/office/drawing/2014/main" id="{54DF5251-499D-4E27-A8BD-D37694471870}"/>
               </a:ext>
             </a:extLst>
           </p:cNvPr>
@@ -4968,7 +4968,7 @@
           <p:cNvPr id="14" name="">
             <a:extLst xmlns:a="http://schemas.openxmlformats.org/drawingml/2006/main">
               <a:ext uri="{FF2B5EF4-FFF2-40B4-BE49-F238E27FC236}">
-                <a16:creationId xmlns:a16="http://schemas.microsoft.com/office/drawing/2014/main" id="{07291C24-38FB-4E45-906C-FB654BC95127}"/>
+                <a16:creationId xmlns:a16="http://schemas.microsoft.com/office/drawing/2014/main" id="{D4F94B1A-B778-4F9E-B411-11220901B880}"/>
               </a:ext>
             </a:extLst>
           </p:cNvPr>
@@ -5002,7 +5002,7 @@
           <p:cNvPr id="15" name="">
             <a:extLst xmlns:a="http://schemas.openxmlformats.org/drawingml/2006/main">
               <a:ext uri="{FF2B5EF4-FFF2-40B4-BE49-F238E27FC236}">
-                <a16:creationId xmlns:a16="http://schemas.microsoft.com/office/drawing/2014/main" id="{709967A3-B571-4280-A04E-458E599B80D2}"/>
+                <a16:creationId xmlns:a16="http://schemas.microsoft.com/office/drawing/2014/main" id="{06BB6F32-6E25-4856-8A1A-BE6076E048F0}"/>
               </a:ext>
             </a:extLst>
           </p:cNvPr>
@@ -5034,7 +5034,7 @@
           <p:cNvPr id="16" name="">
             <a:extLst xmlns:a="http://schemas.openxmlformats.org/drawingml/2006/main">
               <a:ext uri="{FF2B5EF4-FFF2-40B4-BE49-F238E27FC236}">
-                <a16:creationId xmlns:a16="http://schemas.microsoft.com/office/drawing/2014/main" id="{13E6721A-0EEF-4E6B-A591-80DBBEC44E47}"/>
+                <a16:creationId xmlns:a16="http://schemas.microsoft.com/office/drawing/2014/main" id="{F22163CC-EF8E-44CA-8FB4-39E764A978A1}"/>
               </a:ext>
             </a:extLst>
           </p:cNvPr>
@@ -5091,7 +5091,7 @@
           <p:cNvPr id="17" name="">
             <a:extLst xmlns:a="http://schemas.openxmlformats.org/drawingml/2006/main">
               <a:ext uri="{FF2B5EF4-FFF2-40B4-BE49-F238E27FC236}">
-                <a16:creationId xmlns:a16="http://schemas.microsoft.com/office/drawing/2014/main" id="{B0185FEA-017D-4BD8-ABDA-D6DF66B4744E}"/>
+                <a16:creationId xmlns:a16="http://schemas.microsoft.com/office/drawing/2014/main" id="{B5B2E276-7610-421D-94E9-6497B5D6A526}"/>
               </a:ext>
             </a:extLst>
           </p:cNvPr>
@@ -5148,7 +5148,7 @@
           <p:cNvPr id="18" name="">
             <a:extLst xmlns:a="http://schemas.openxmlformats.org/drawingml/2006/main">
               <a:ext uri="{FF2B5EF4-FFF2-40B4-BE49-F238E27FC236}">
-                <a16:creationId xmlns:a16="http://schemas.microsoft.com/office/drawing/2014/main" id="{B172B3A2-8388-4260-B290-E6A48A000883}"/>
+                <a16:creationId xmlns:a16="http://schemas.microsoft.com/office/drawing/2014/main" id="{71E37571-F06E-41C1-BA26-FA06024A4F99}"/>
               </a:ext>
             </a:extLst>
           </p:cNvPr>
@@ -5182,7 +5182,7 @@
           <p:cNvPr id="19" name="">
             <a:extLst xmlns:a="http://schemas.openxmlformats.org/drawingml/2006/main">
               <a:ext uri="{FF2B5EF4-FFF2-40B4-BE49-F238E27FC236}">
-                <a16:creationId xmlns:a16="http://schemas.microsoft.com/office/drawing/2014/main" id="{E3FE5264-BBDB-444A-8BFD-FD36CC08DCE3}"/>
+                <a16:creationId xmlns:a16="http://schemas.microsoft.com/office/drawing/2014/main" id="{C992D07F-A993-40EE-9804-E4199AC1EC0A}"/>
               </a:ext>
             </a:extLst>
           </p:cNvPr>
@@ -5214,7 +5214,7 @@
           <p:cNvPr id="20" name="">
             <a:extLst xmlns:a="http://schemas.openxmlformats.org/drawingml/2006/main">
               <a:ext uri="{FF2B5EF4-FFF2-40B4-BE49-F238E27FC236}">
-                <a16:creationId xmlns:a16="http://schemas.microsoft.com/office/drawing/2014/main" id="{B02D29B0-B94C-4C63-93F7-4D837D765A68}"/>
+                <a16:creationId xmlns:a16="http://schemas.microsoft.com/office/drawing/2014/main" id="{23EA0D8C-E2FD-487E-BED7-1AE9148699A0}"/>
               </a:ext>
             </a:extLst>
           </p:cNvPr>
@@ -5271,7 +5271,7 @@
           <p:cNvPr id="21" name="">
             <a:extLst xmlns:a="http://schemas.openxmlformats.org/drawingml/2006/main">
               <a:ext uri="{FF2B5EF4-FFF2-40B4-BE49-F238E27FC236}">
-                <a16:creationId xmlns:a16="http://schemas.microsoft.com/office/drawing/2014/main" id="{4E387F03-B88C-482D-A858-69FCF80417CC}"/>
+                <a16:creationId xmlns:a16="http://schemas.microsoft.com/office/drawing/2014/main" id="{D9D32420-D8EB-40D2-A823-806D957718AE}"/>
               </a:ext>
             </a:extLst>
           </p:cNvPr>
@@ -5328,7 +5328,7 @@
           <p:cNvPr id="22" name="">
             <a:extLst xmlns:a="http://schemas.openxmlformats.org/drawingml/2006/main">
               <a:ext uri="{FF2B5EF4-FFF2-40B4-BE49-F238E27FC236}">
-                <a16:creationId xmlns:a16="http://schemas.microsoft.com/office/drawing/2014/main" id="{5C90CA97-B35F-476D-BEEF-B4D2EFFF4D86}"/>
+                <a16:creationId xmlns:a16="http://schemas.microsoft.com/office/drawing/2014/main" id="{39B9257A-9B2E-44DC-8E18-7E1564B8DE3B}"/>
               </a:ext>
             </a:extLst>
           </p:cNvPr>
@@ -5383,7 +5383,7 @@
     </p:spTree>
     <p:extLst>
       <p:ext uri="{BB962C8B-B14F-4D97-AF65-F5344CB8AC3E}">
-        <p14:creationId xmlns:p14="http://schemas.microsoft.com/office/powerpoint/2010/main" val="1098512621"/>
+        <p14:creationId xmlns:p14="http://schemas.microsoft.com/office/powerpoint/2010/main" val="262693068"/>
       </p:ext>
     </p:extLst>
   </p:cSld>
@@ -5584,7 +5584,7 @@
           <p:cNvPr id="23" name="">
             <a:extLst xmlns:a="http://schemas.openxmlformats.org/drawingml/2006/main">
               <a:ext uri="{FF2B5EF4-FFF2-40B4-BE49-F238E27FC236}">
-                <a16:creationId xmlns:a16="http://schemas.microsoft.com/office/drawing/2014/main" id="{06B1BC41-7964-40C6-8159-4BEA4A1A88A8}"/>
+                <a16:creationId xmlns:a16="http://schemas.microsoft.com/office/drawing/2014/main" id="{5CF5F743-44DA-4D05-A030-A70B8806FBE7}"/>
               </a:ext>
             </a:extLst>
           </p:cNvPr>
@@ -5616,7 +5616,7 @@
           <p:cNvPr id="2" name="">
             <a:extLst xmlns:a="http://schemas.openxmlformats.org/drawingml/2006/main">
               <a:ext uri="{FF2B5EF4-FFF2-40B4-BE49-F238E27FC236}">
-                <a16:creationId xmlns:a16="http://schemas.microsoft.com/office/drawing/2014/main" id="{C887C6FA-7B21-491E-A99F-2A9DE492638B}"/>
+                <a16:creationId xmlns:a16="http://schemas.microsoft.com/office/drawing/2014/main" id="{06803C0D-9351-4D3F-B336-3EF00C3A7CD2}"/>
               </a:ext>
             </a:extLst>
           </p:cNvPr>
@@ -5673,7 +5673,7 @@
           <p:cNvPr id="3" name="">
             <a:extLst xmlns:a="http://schemas.openxmlformats.org/drawingml/2006/main">
               <a:ext uri="{FF2B5EF4-FFF2-40B4-BE49-F238E27FC236}">
-                <a16:creationId xmlns:a16="http://schemas.microsoft.com/office/drawing/2014/main" id="{7356F2F1-BCFA-43C5-8368-923F819CE96F}"/>
+                <a16:creationId xmlns:a16="http://schemas.microsoft.com/office/drawing/2014/main" id="{5C4B69DE-2C17-43F5-8A82-619951FDD0F1}"/>
               </a:ext>
             </a:extLst>
           </p:cNvPr>
@@ -5705,7 +5705,7 @@
           <p:cNvPr id="4" name="">
             <a:extLst xmlns:a="http://schemas.openxmlformats.org/drawingml/2006/main">
               <a:ext uri="{FF2B5EF4-FFF2-40B4-BE49-F238E27FC236}">
-                <a16:creationId xmlns:a16="http://schemas.microsoft.com/office/drawing/2014/main" id="{5692EDAA-4F41-428A-918A-321C0BEE698C}"/>
+                <a16:creationId xmlns:a16="http://schemas.microsoft.com/office/drawing/2014/main" id="{D1EB3EEA-DC57-45E2-8D84-08CDEE454601}"/>
               </a:ext>
             </a:extLst>
           </p:cNvPr>
@@ -5762,7 +5762,7 @@
           <p:cNvPr id="5" name="">
             <a:extLst xmlns:a="http://schemas.openxmlformats.org/drawingml/2006/main">
               <a:ext uri="{FF2B5EF4-FFF2-40B4-BE49-F238E27FC236}">
-                <a16:creationId xmlns:a16="http://schemas.microsoft.com/office/drawing/2014/main" id="{BF288ABB-984C-400F-BE9B-10A4DA26C4ED}"/>
+                <a16:creationId xmlns:a16="http://schemas.microsoft.com/office/drawing/2014/main" id="{796F4603-2120-4915-ADDE-609DFC440FAF}"/>
               </a:ext>
             </a:extLst>
           </p:cNvPr>
@@ -5819,7 +5819,7 @@
           <p:cNvPr id="6" name="">
             <a:extLst xmlns:a="http://schemas.openxmlformats.org/drawingml/2006/main">
               <a:ext uri="{FF2B5EF4-FFF2-40B4-BE49-F238E27FC236}">
-                <a16:creationId xmlns:a16="http://schemas.microsoft.com/office/drawing/2014/main" id="{32EBFE73-B91B-48C4-8FC8-463F1C90060A}"/>
+                <a16:creationId xmlns:a16="http://schemas.microsoft.com/office/drawing/2014/main" id="{64084010-F358-4C26-8B9E-87DF9EF6ED1E}"/>
               </a:ext>
             </a:extLst>
           </p:cNvPr>
@@ -5876,7 +5876,7 @@
           <p:cNvPr id="7" name="">
             <a:extLst xmlns:a="http://schemas.openxmlformats.org/drawingml/2006/main">
               <a:ext uri="{FF2B5EF4-FFF2-40B4-BE49-F238E27FC236}">
-                <a16:creationId xmlns:a16="http://schemas.microsoft.com/office/drawing/2014/main" id="{D1032AA4-2843-4C9E-8952-6BD40140787D}"/>
+                <a16:creationId xmlns:a16="http://schemas.microsoft.com/office/drawing/2014/main" id="{A1A235F2-61A4-415D-BE65-F4387778D4CF}"/>
               </a:ext>
             </a:extLst>
           </p:cNvPr>
@@ -5908,7 +5908,7 @@
           <p:cNvPr id="8" name="">
             <a:extLst xmlns:a="http://schemas.openxmlformats.org/drawingml/2006/main">
               <a:ext uri="{FF2B5EF4-FFF2-40B4-BE49-F238E27FC236}">
-                <a16:creationId xmlns:a16="http://schemas.microsoft.com/office/drawing/2014/main" id="{695EF5BA-1848-43DC-945B-26E37BB2D750}"/>
+                <a16:creationId xmlns:a16="http://schemas.microsoft.com/office/drawing/2014/main" id="{3967346E-C227-47F5-BA16-DBA73CCFAC54}"/>
               </a:ext>
             </a:extLst>
           </p:cNvPr>
@@ -5965,7 +5965,7 @@
           <p:cNvPr id="9" name="">
             <a:extLst xmlns:a="http://schemas.openxmlformats.org/drawingml/2006/main">
               <a:ext uri="{FF2B5EF4-FFF2-40B4-BE49-F238E27FC236}">
-                <a16:creationId xmlns:a16="http://schemas.microsoft.com/office/drawing/2014/main" id="{EB31A754-92EC-4883-AC3B-3D8951645341}"/>
+                <a16:creationId xmlns:a16="http://schemas.microsoft.com/office/drawing/2014/main" id="{B016ACAE-C811-489F-915B-B7321172E305}"/>
               </a:ext>
             </a:extLst>
           </p:cNvPr>
@@ -6022,7 +6022,7 @@
           <p:cNvPr id="10" name="">
             <a:extLst xmlns:a="http://schemas.openxmlformats.org/drawingml/2006/main">
               <a:ext uri="{FF2B5EF4-FFF2-40B4-BE49-F238E27FC236}">
-                <a16:creationId xmlns:a16="http://schemas.microsoft.com/office/drawing/2014/main" id="{4E85A7A4-FB5C-4560-93B4-E01C5759CFBF}"/>
+                <a16:creationId xmlns:a16="http://schemas.microsoft.com/office/drawing/2014/main" id="{E19F423C-F7B3-4351-90B9-7C35D2488E44}"/>
               </a:ext>
             </a:extLst>
           </p:cNvPr>
@@ -6056,7 +6056,7 @@
           <p:cNvPr id="11" name="">
             <a:extLst xmlns:a="http://schemas.openxmlformats.org/drawingml/2006/main">
               <a:ext uri="{FF2B5EF4-FFF2-40B4-BE49-F238E27FC236}">
-                <a16:creationId xmlns:a16="http://schemas.microsoft.com/office/drawing/2014/main" id="{F6AC07A2-C5A7-42ED-8552-34973C104A2D}"/>
+                <a16:creationId xmlns:a16="http://schemas.microsoft.com/office/drawing/2014/main" id="{97E23B39-CF1D-4780-B837-86195067A9D3}"/>
               </a:ext>
             </a:extLst>
           </p:cNvPr>
@@ -6088,7 +6088,7 @@
           <p:cNvPr id="12" name="">
             <a:extLst xmlns:a="http://schemas.openxmlformats.org/drawingml/2006/main">
               <a:ext uri="{FF2B5EF4-FFF2-40B4-BE49-F238E27FC236}">
-                <a16:creationId xmlns:a16="http://schemas.microsoft.com/office/drawing/2014/main" id="{5ED6CC8A-1984-4F72-A299-2049947ADCD1}"/>
+                <a16:creationId xmlns:a16="http://schemas.microsoft.com/office/drawing/2014/main" id="{96D5FACE-D774-4EF5-9AD2-C245ACD37CB5}"/>
               </a:ext>
             </a:extLst>
           </p:cNvPr>
@@ -6145,7 +6145,7 @@
           <p:cNvPr id="13" name="">
             <a:extLst xmlns:a="http://schemas.openxmlformats.org/drawingml/2006/main">
               <a:ext uri="{FF2B5EF4-FFF2-40B4-BE49-F238E27FC236}">
-                <a16:creationId xmlns:a16="http://schemas.microsoft.com/office/drawing/2014/main" id="{04D59A99-FBF3-4421-ABE2-3E833E38A5B4}"/>
+                <a16:creationId xmlns:a16="http://schemas.microsoft.com/office/drawing/2014/main" id="{F89C3529-BBCE-4F4B-ACDD-F2C5105D3E0C}"/>
               </a:ext>
             </a:extLst>
           </p:cNvPr>
@@ -6202,7 +6202,7 @@
           <p:cNvPr id="14" name="">
             <a:extLst xmlns:a="http://schemas.openxmlformats.org/drawingml/2006/main">
               <a:ext uri="{FF2B5EF4-FFF2-40B4-BE49-F238E27FC236}">
-                <a16:creationId xmlns:a16="http://schemas.microsoft.com/office/drawing/2014/main" id="{C6B8E59E-949F-415D-8668-ABC00ED604A2}"/>
+                <a16:creationId xmlns:a16="http://schemas.microsoft.com/office/drawing/2014/main" id="{C02FEF81-5302-4148-9E23-67BF44529073}"/>
               </a:ext>
             </a:extLst>
           </p:cNvPr>
@@ -6236,7 +6236,7 @@
           <p:cNvPr id="15" name="">
             <a:extLst xmlns:a="http://schemas.openxmlformats.org/drawingml/2006/main">
               <a:ext uri="{FF2B5EF4-FFF2-40B4-BE49-F238E27FC236}">
-                <a16:creationId xmlns:a16="http://schemas.microsoft.com/office/drawing/2014/main" id="{707337B1-C5EF-4E50-B489-3F2CFF79E23D}"/>
+                <a16:creationId xmlns:a16="http://schemas.microsoft.com/office/drawing/2014/main" id="{C792E199-93A6-4EA5-9812-5FCB1317F657}"/>
               </a:ext>
             </a:extLst>
           </p:cNvPr>
@@ -6268,7 +6268,7 @@
           <p:cNvPr id="16" name="">
             <a:extLst xmlns:a="http://schemas.openxmlformats.org/drawingml/2006/main">
               <a:ext uri="{FF2B5EF4-FFF2-40B4-BE49-F238E27FC236}">
-                <a16:creationId xmlns:a16="http://schemas.microsoft.com/office/drawing/2014/main" id="{425E85C2-88EE-4C52-8F62-19B779AFDA09}"/>
+                <a16:creationId xmlns:a16="http://schemas.microsoft.com/office/drawing/2014/main" id="{791C416E-CE3B-46EF-AA64-6F463613FFAE}"/>
               </a:ext>
             </a:extLst>
           </p:cNvPr>
@@ -6325,7 +6325,7 @@
           <p:cNvPr id="17" name="">
             <a:extLst xmlns:a="http://schemas.openxmlformats.org/drawingml/2006/main">
               <a:ext uri="{FF2B5EF4-FFF2-40B4-BE49-F238E27FC236}">
-                <a16:creationId xmlns:a16="http://schemas.microsoft.com/office/drawing/2014/main" id="{54F38DAE-5FAF-4792-81C3-EE6575CFCD27}"/>
+                <a16:creationId xmlns:a16="http://schemas.microsoft.com/office/drawing/2014/main" id="{C0F51B08-C55D-4257-AEBD-F0757DDBE192}"/>
               </a:ext>
             </a:extLst>
           </p:cNvPr>
@@ -6382,7 +6382,7 @@
           <p:cNvPr id="18" name="">
             <a:extLst xmlns:a="http://schemas.openxmlformats.org/drawingml/2006/main">
               <a:ext uri="{FF2B5EF4-FFF2-40B4-BE49-F238E27FC236}">
-                <a16:creationId xmlns:a16="http://schemas.microsoft.com/office/drawing/2014/main" id="{B6482B07-71AE-48EA-8E43-78EA2E4F58BB}"/>
+                <a16:creationId xmlns:a16="http://schemas.microsoft.com/office/drawing/2014/main" id="{38696943-3EEE-4960-B21D-265905AC7087}"/>
               </a:ext>
             </a:extLst>
           </p:cNvPr>
@@ -6416,7 +6416,7 @@
           <p:cNvPr id="19" name="">
             <a:extLst xmlns:a="http://schemas.openxmlformats.org/drawingml/2006/main">
               <a:ext uri="{FF2B5EF4-FFF2-40B4-BE49-F238E27FC236}">
-                <a16:creationId xmlns:a16="http://schemas.microsoft.com/office/drawing/2014/main" id="{A0881876-3F05-44C3-9BC2-BCD4B5DF3199}"/>
+                <a16:creationId xmlns:a16="http://schemas.microsoft.com/office/drawing/2014/main" id="{01BA20C1-7166-4229-9699-770FCDCE4499}"/>
               </a:ext>
             </a:extLst>
           </p:cNvPr>
@@ -6448,7 +6448,7 @@
           <p:cNvPr id="20" name="">
             <a:extLst xmlns:a="http://schemas.openxmlformats.org/drawingml/2006/main">
               <a:ext uri="{FF2B5EF4-FFF2-40B4-BE49-F238E27FC236}">
-                <a16:creationId xmlns:a16="http://schemas.microsoft.com/office/drawing/2014/main" id="{29AF09D0-EEB2-41A7-BCD7-35A24050F06A}"/>
+                <a16:creationId xmlns:a16="http://schemas.microsoft.com/office/drawing/2014/main" id="{0382DE59-2EE6-44F7-9A94-D6EAF8F3AF64}"/>
               </a:ext>
             </a:extLst>
           </p:cNvPr>
@@ -6505,7 +6505,7 @@
           <p:cNvPr id="21" name="">
             <a:extLst xmlns:a="http://schemas.openxmlformats.org/drawingml/2006/main">
               <a:ext uri="{FF2B5EF4-FFF2-40B4-BE49-F238E27FC236}">
-                <a16:creationId xmlns:a16="http://schemas.microsoft.com/office/drawing/2014/main" id="{68DAE74F-1663-49DC-8EF4-60A0310D3CEC}"/>
+                <a16:creationId xmlns:a16="http://schemas.microsoft.com/office/drawing/2014/main" id="{BB438768-C938-4550-9FE6-7CBFA954F5C6}"/>
               </a:ext>
             </a:extLst>
           </p:cNvPr>
@@ -6562,7 +6562,7 @@
           <p:cNvPr id="22" name="">
             <a:extLst xmlns:a="http://schemas.openxmlformats.org/drawingml/2006/main">
               <a:ext uri="{FF2B5EF4-FFF2-40B4-BE49-F238E27FC236}">
-                <a16:creationId xmlns:a16="http://schemas.microsoft.com/office/drawing/2014/main" id="{B7E048AC-0469-4462-80C0-FD8078BCEAA8}"/>
+                <a16:creationId xmlns:a16="http://schemas.microsoft.com/office/drawing/2014/main" id="{97BDE90A-BDCD-45F4-B747-D468C28AA5E8}"/>
               </a:ext>
             </a:extLst>
           </p:cNvPr>
@@ -6617,7 +6617,7 @@
     </p:spTree>
     <p:extLst>
       <p:ext uri="{BB962C8B-B14F-4D97-AF65-F5344CB8AC3E}">
-        <p14:creationId xmlns:p14="http://schemas.microsoft.com/office/powerpoint/2010/main" val="1727592844"/>
+        <p14:creationId xmlns:p14="http://schemas.microsoft.com/office/powerpoint/2010/main" val="406429740"/>
       </p:ext>
     </p:extLst>
   </p:cSld>
@@ -6818,7 +6818,7 @@
           <p:cNvPr id="16" name="">
             <a:extLst xmlns:a="http://schemas.openxmlformats.org/drawingml/2006/main">
               <a:ext uri="{FF2B5EF4-FFF2-40B4-BE49-F238E27FC236}">
-                <a16:creationId xmlns:a16="http://schemas.microsoft.com/office/drawing/2014/main" id="{09677629-F5A0-4D34-8C10-0463593EAD46}"/>
+                <a16:creationId xmlns:a16="http://schemas.microsoft.com/office/drawing/2014/main" id="{3D23C36F-1A4D-4E98-A331-8B0FBB3EEA48}"/>
               </a:ext>
             </a:extLst>
           </p:cNvPr>
@@ -6850,7 +6850,7 @@
           <p:cNvPr id="2" name="">
             <a:extLst xmlns:a="http://schemas.openxmlformats.org/drawingml/2006/main">
               <a:ext uri="{FF2B5EF4-FFF2-40B4-BE49-F238E27FC236}">
-                <a16:creationId xmlns:a16="http://schemas.microsoft.com/office/drawing/2014/main" id="{18B0D811-B43B-45B5-BD96-293A0C6C658B}"/>
+                <a16:creationId xmlns:a16="http://schemas.microsoft.com/office/drawing/2014/main" id="{C8CF8ED5-1DF9-4029-82F2-6F04414F6C0B}"/>
               </a:ext>
             </a:extLst>
           </p:cNvPr>
@@ -6907,7 +6907,7 @@
           <p:cNvPr id="3" name="">
             <a:extLst xmlns:a="http://schemas.openxmlformats.org/drawingml/2006/main">
               <a:ext uri="{FF2B5EF4-FFF2-40B4-BE49-F238E27FC236}">
-                <a16:creationId xmlns:a16="http://schemas.microsoft.com/office/drawing/2014/main" id="{1D0C077C-655B-4E5F-9C41-97BF64707BA8}"/>
+                <a16:creationId xmlns:a16="http://schemas.microsoft.com/office/drawing/2014/main" id="{F09814B8-262F-4A7C-BC2A-95BA12EEF0DC}"/>
               </a:ext>
             </a:extLst>
           </p:cNvPr>
@@ -6939,7 +6939,7 @@
           <p:cNvPr id="4" name="">
             <a:extLst xmlns:a="http://schemas.openxmlformats.org/drawingml/2006/main">
               <a:ext uri="{FF2B5EF4-FFF2-40B4-BE49-F238E27FC236}">
-                <a16:creationId xmlns:a16="http://schemas.microsoft.com/office/drawing/2014/main" id="{CD5C9FB0-B839-4CCA-97CF-E8DBE57E21B5}"/>
+                <a16:creationId xmlns:a16="http://schemas.microsoft.com/office/drawing/2014/main" id="{6FCB3006-1BED-4E87-8F6E-8902EDA7C429}"/>
               </a:ext>
             </a:extLst>
           </p:cNvPr>
@@ -6996,7 +6996,7 @@
           <p:cNvPr id="5" name="">
             <a:extLst xmlns:a="http://schemas.openxmlformats.org/drawingml/2006/main">
               <a:ext uri="{FF2B5EF4-FFF2-40B4-BE49-F238E27FC236}">
-                <a16:creationId xmlns:a16="http://schemas.microsoft.com/office/drawing/2014/main" id="{93E4E1C4-65AB-4C1D-A5C6-44D6EC092DA6}"/>
+                <a16:creationId xmlns:a16="http://schemas.microsoft.com/office/drawing/2014/main" id="{B01CAE9F-CBFA-40EB-A3BB-135E663A47B1}"/>
               </a:ext>
             </a:extLst>
           </p:cNvPr>
@@ -7053,7 +7053,7 @@
           <p:cNvPr id="6" name="">
             <a:extLst xmlns:a="http://schemas.openxmlformats.org/drawingml/2006/main">
               <a:ext uri="{FF2B5EF4-FFF2-40B4-BE49-F238E27FC236}">
-                <a16:creationId xmlns:a16="http://schemas.microsoft.com/office/drawing/2014/main" id="{9F729A7D-531B-4D9F-8E02-D42D665DA27F}"/>
+                <a16:creationId xmlns:a16="http://schemas.microsoft.com/office/drawing/2014/main" id="{5F79089B-31C2-436A-A916-5ABBEBC5F094}"/>
               </a:ext>
             </a:extLst>
           </p:cNvPr>
@@ -7110,7 +7110,7 @@
           <p:cNvPr id="7" name="">
             <a:extLst xmlns:a="http://schemas.openxmlformats.org/drawingml/2006/main">
               <a:ext uri="{FF2B5EF4-FFF2-40B4-BE49-F238E27FC236}">
-                <a16:creationId xmlns:a16="http://schemas.microsoft.com/office/drawing/2014/main" id="{1E631A27-A080-474A-949C-5D62A0B0D53C}"/>
+                <a16:creationId xmlns:a16="http://schemas.microsoft.com/office/drawing/2014/main" id="{82CC6F18-602B-4AE3-9581-D58D4CC037B7}"/>
               </a:ext>
             </a:extLst>
           </p:cNvPr>
@@ -7142,7 +7142,7 @@
           <p:cNvPr id="8" name="">
             <a:extLst xmlns:a="http://schemas.openxmlformats.org/drawingml/2006/main">
               <a:ext uri="{FF2B5EF4-FFF2-40B4-BE49-F238E27FC236}">
-                <a16:creationId xmlns:a16="http://schemas.microsoft.com/office/drawing/2014/main" id="{9F230CA2-BA22-47E5-93FD-FC629A255187}"/>
+                <a16:creationId xmlns:a16="http://schemas.microsoft.com/office/drawing/2014/main" id="{F17A83DC-CC3D-4F1A-A86D-172BC1639D1B}"/>
               </a:ext>
             </a:extLst>
           </p:cNvPr>
@@ -7199,7 +7199,7 @@
           <p:cNvPr id="9" name="">
             <a:extLst xmlns:a="http://schemas.openxmlformats.org/drawingml/2006/main">
               <a:ext uri="{FF2B5EF4-FFF2-40B4-BE49-F238E27FC236}">
-                <a16:creationId xmlns:a16="http://schemas.microsoft.com/office/drawing/2014/main" id="{75D214EF-EBE6-46C0-B6F7-ECE7E255372C}"/>
+                <a16:creationId xmlns:a16="http://schemas.microsoft.com/office/drawing/2014/main" id="{31B851C7-7E1F-4C91-8748-21B8945B18CA}"/>
               </a:ext>
             </a:extLst>
           </p:cNvPr>
@@ -7256,7 +7256,7 @@
           <p:cNvPr id="10" name="">
             <a:extLst xmlns:a="http://schemas.openxmlformats.org/drawingml/2006/main">
               <a:ext uri="{FF2B5EF4-FFF2-40B4-BE49-F238E27FC236}">
-                <a16:creationId xmlns:a16="http://schemas.microsoft.com/office/drawing/2014/main" id="{AD741DCE-28BE-4F46-93BA-C7B7D6F520FD}"/>
+                <a16:creationId xmlns:a16="http://schemas.microsoft.com/office/drawing/2014/main" id="{4CD78959-2958-44B6-8336-152383CA9511}"/>
               </a:ext>
             </a:extLst>
           </p:cNvPr>
@@ -7313,7 +7313,7 @@
           <p:cNvPr id="11" name="">
             <a:extLst xmlns:a="http://schemas.openxmlformats.org/drawingml/2006/main">
               <a:ext uri="{FF2B5EF4-FFF2-40B4-BE49-F238E27FC236}">
-                <a16:creationId xmlns:a16="http://schemas.microsoft.com/office/drawing/2014/main" id="{A154D499-EF94-45CC-939F-7BA15B578A1F}"/>
+                <a16:creationId xmlns:a16="http://schemas.microsoft.com/office/drawing/2014/main" id="{1748E30B-7453-4535-96A5-14D4215354ED}"/>
               </a:ext>
             </a:extLst>
           </p:cNvPr>
@@ -7345,7 +7345,7 @@
           <p:cNvPr id="12" name="">
             <a:extLst xmlns:a="http://schemas.openxmlformats.org/drawingml/2006/main">
               <a:ext uri="{FF2B5EF4-FFF2-40B4-BE49-F238E27FC236}">
-                <a16:creationId xmlns:a16="http://schemas.microsoft.com/office/drawing/2014/main" id="{E51E936A-17DD-4A52-AFB5-84117CEB4A12}"/>
+                <a16:creationId xmlns:a16="http://schemas.microsoft.com/office/drawing/2014/main" id="{D303C212-2766-49D7-9B15-7C585AE9A383}"/>
               </a:ext>
             </a:extLst>
           </p:cNvPr>
@@ -7402,7 +7402,7 @@
           <p:cNvPr id="13" name="">
             <a:extLst xmlns:a="http://schemas.openxmlformats.org/drawingml/2006/main">
               <a:ext uri="{FF2B5EF4-FFF2-40B4-BE49-F238E27FC236}">
-                <a16:creationId xmlns:a16="http://schemas.microsoft.com/office/drawing/2014/main" id="{7A386090-1E3E-465C-878E-3345EC18321E}"/>
+                <a16:creationId xmlns:a16="http://schemas.microsoft.com/office/drawing/2014/main" id="{C38D46F1-FE0D-49ED-8719-04DA1FB231E4}"/>
               </a:ext>
             </a:extLst>
           </p:cNvPr>
@@ -7459,7 +7459,7 @@
           <p:cNvPr id="14" name="">
             <a:extLst xmlns:a="http://schemas.openxmlformats.org/drawingml/2006/main">
               <a:ext uri="{FF2B5EF4-FFF2-40B4-BE49-F238E27FC236}">
-                <a16:creationId xmlns:a16="http://schemas.microsoft.com/office/drawing/2014/main" id="{492308F7-8395-48D6-BD6A-9D76087A5173}"/>
+                <a16:creationId xmlns:a16="http://schemas.microsoft.com/office/drawing/2014/main" id="{82B5197A-E459-49CF-A5C4-DC9ECEBF698E}"/>
               </a:ext>
             </a:extLst>
           </p:cNvPr>
@@ -7516,7 +7516,7 @@
           <p:cNvPr id="15" name="">
             <a:extLst xmlns:a="http://schemas.openxmlformats.org/drawingml/2006/main">
               <a:ext uri="{FF2B5EF4-FFF2-40B4-BE49-F238E27FC236}">
-                <a16:creationId xmlns:a16="http://schemas.microsoft.com/office/drawing/2014/main" id="{64B68AC4-9B1C-4B8F-B2A2-2A24651E25EA}"/>
+                <a16:creationId xmlns:a16="http://schemas.microsoft.com/office/drawing/2014/main" id="{FFA064E0-85AA-4219-9134-166E2AAFDAF5}"/>
               </a:ext>
             </a:extLst>
           </p:cNvPr>
@@ -7571,7 +7571,7 @@
     </p:spTree>
     <p:extLst>
       <p:ext uri="{BB962C8B-B14F-4D97-AF65-F5344CB8AC3E}">
-        <p14:creationId xmlns:p14="http://schemas.microsoft.com/office/powerpoint/2010/main" val="1055561145"/>
+        <p14:creationId xmlns:p14="http://schemas.microsoft.com/office/powerpoint/2010/main" val="1922615977"/>
       </p:ext>
     </p:extLst>
   </p:cSld>
@@ -7772,7 +7772,7 @@
           <p:cNvPr id="23" name="">
             <a:extLst xmlns:a="http://schemas.openxmlformats.org/drawingml/2006/main">
               <a:ext uri="{FF2B5EF4-FFF2-40B4-BE49-F238E27FC236}">
-                <a16:creationId xmlns:a16="http://schemas.microsoft.com/office/drawing/2014/main" id="{A5728D6B-CA49-42E1-80C8-466BD188EDBD}"/>
+                <a16:creationId xmlns:a16="http://schemas.microsoft.com/office/drawing/2014/main" id="{E0119B84-AC71-4C43-90B4-DDDCADBD5853}"/>
               </a:ext>
             </a:extLst>
           </p:cNvPr>
@@ -7804,7 +7804,7 @@
           <p:cNvPr id="2" name="">
             <a:extLst xmlns:a="http://schemas.openxmlformats.org/drawingml/2006/main">
               <a:ext uri="{FF2B5EF4-FFF2-40B4-BE49-F238E27FC236}">
-                <a16:creationId xmlns:a16="http://schemas.microsoft.com/office/drawing/2014/main" id="{80BA5163-1B51-4F53-B72A-435D3973467C}"/>
+                <a16:creationId xmlns:a16="http://schemas.microsoft.com/office/drawing/2014/main" id="{30EED194-7064-4536-B278-72B682BBC0C9}"/>
               </a:ext>
             </a:extLst>
           </p:cNvPr>
@@ -7861,7 +7861,7 @@
           <p:cNvPr id="3" name="">
             <a:extLst xmlns:a="http://schemas.openxmlformats.org/drawingml/2006/main">
               <a:ext uri="{FF2B5EF4-FFF2-40B4-BE49-F238E27FC236}">
-                <a16:creationId xmlns:a16="http://schemas.microsoft.com/office/drawing/2014/main" id="{6FD759BB-14EE-43A3-A6FE-9C3D4CD94F08}"/>
+                <a16:creationId xmlns:a16="http://schemas.microsoft.com/office/drawing/2014/main" id="{406AB894-8811-4922-A527-D728348B10D6}"/>
               </a:ext>
             </a:extLst>
           </p:cNvPr>
@@ -7893,7 +7893,7 @@
           <p:cNvPr id="4" name="">
             <a:extLst xmlns:a="http://schemas.openxmlformats.org/drawingml/2006/main">
               <a:ext uri="{FF2B5EF4-FFF2-40B4-BE49-F238E27FC236}">
-                <a16:creationId xmlns:a16="http://schemas.microsoft.com/office/drawing/2014/main" id="{0D8EF610-AADE-4FE2-947D-161B6744DC84}"/>
+                <a16:creationId xmlns:a16="http://schemas.microsoft.com/office/drawing/2014/main" id="{38CCF628-F497-4F8A-BFA9-55AC7457E5E2}"/>
               </a:ext>
             </a:extLst>
           </p:cNvPr>
@@ -7950,7 +7950,7 @@
           <p:cNvPr id="5" name="">
             <a:extLst xmlns:a="http://schemas.openxmlformats.org/drawingml/2006/main">
               <a:ext uri="{FF2B5EF4-FFF2-40B4-BE49-F238E27FC236}">
-                <a16:creationId xmlns:a16="http://schemas.microsoft.com/office/drawing/2014/main" id="{B0D5E76E-C7EA-4596-B883-17FDE290976C}"/>
+                <a16:creationId xmlns:a16="http://schemas.microsoft.com/office/drawing/2014/main" id="{750B94EB-E88A-4D1B-BA17-A6D4ABB16D09}"/>
               </a:ext>
             </a:extLst>
           </p:cNvPr>
@@ -8007,7 +8007,7 @@
           <p:cNvPr id="6" name="">
             <a:extLst xmlns:a="http://schemas.openxmlformats.org/drawingml/2006/main">
               <a:ext uri="{FF2B5EF4-FFF2-40B4-BE49-F238E27FC236}">
-                <a16:creationId xmlns:a16="http://schemas.microsoft.com/office/drawing/2014/main" id="{41C98888-1AFA-4DB8-94F7-89709026074A}"/>
+                <a16:creationId xmlns:a16="http://schemas.microsoft.com/office/drawing/2014/main" id="{E286AAE5-4AEE-4FCC-AC1B-DD2D15C6C089}"/>
               </a:ext>
             </a:extLst>
           </p:cNvPr>
@@ -8064,7 +8064,7 @@
           <p:cNvPr id="7" name="">
             <a:extLst xmlns:a="http://schemas.openxmlformats.org/drawingml/2006/main">
               <a:ext uri="{FF2B5EF4-FFF2-40B4-BE49-F238E27FC236}">
-                <a16:creationId xmlns:a16="http://schemas.microsoft.com/office/drawing/2014/main" id="{08CE2C3E-CDE7-4C2F-AEEE-98AECDB295FB}"/>
+                <a16:creationId xmlns:a16="http://schemas.microsoft.com/office/drawing/2014/main" id="{AF8B008A-0F2A-4239-A8AC-68449F35BAB4}"/>
               </a:ext>
             </a:extLst>
           </p:cNvPr>
@@ -8096,7 +8096,7 @@
           <p:cNvPr id="8" name="">
             <a:extLst xmlns:a="http://schemas.openxmlformats.org/drawingml/2006/main">
               <a:ext uri="{FF2B5EF4-FFF2-40B4-BE49-F238E27FC236}">
-                <a16:creationId xmlns:a16="http://schemas.microsoft.com/office/drawing/2014/main" id="{AD443DA9-94CA-4139-A43B-D2A899AD5FE9}"/>
+                <a16:creationId xmlns:a16="http://schemas.microsoft.com/office/drawing/2014/main" id="{FDB35392-1270-4597-8600-9A7DDE408A3E}"/>
               </a:ext>
             </a:extLst>
           </p:cNvPr>
@@ -8153,7 +8153,7 @@
           <p:cNvPr id="9" name="">
             <a:extLst xmlns:a="http://schemas.openxmlformats.org/drawingml/2006/main">
               <a:ext uri="{FF2B5EF4-FFF2-40B4-BE49-F238E27FC236}">
-                <a16:creationId xmlns:a16="http://schemas.microsoft.com/office/drawing/2014/main" id="{A809D116-760B-423F-B7A3-7994F9A63DD1}"/>
+                <a16:creationId xmlns:a16="http://schemas.microsoft.com/office/drawing/2014/main" id="{361C0358-184C-4D98-BDE9-E49935454C42}"/>
               </a:ext>
             </a:extLst>
           </p:cNvPr>
@@ -8210,19 +8210,19 @@
           <p:cNvPr id="10" name="">
             <a:extLst xmlns:a="http://schemas.openxmlformats.org/drawingml/2006/main">
               <a:ext uri="{FF2B5EF4-FFF2-40B4-BE49-F238E27FC236}">
-                <a16:creationId xmlns:a16="http://schemas.microsoft.com/office/drawing/2014/main" id="{2CF8C571-BCBD-4CDB-A1DB-E0570511EAA3}"/>
-              </a:ext>
-            </a:extLst>
-          </p:cNvPr>
-          <p:cNvSpPr>
-            <a:spLocks xmlns:a="http://schemas.openxmlformats.org/drawingml/2006/main" noGrp="1"/>
-          </p:cNvSpPr>
-          <p:nvPr/>
-        </p:nvSpPr>
-        <p:spPr>
-          <a:xfrm xmlns:a="http://schemas.openxmlformats.org/drawingml/2006/main">
-            <a:off x="914400" y="1257300"/>
-            <a:ext cx="10363200" cy="781050"/>
+                <a16:creationId xmlns:a16="http://schemas.microsoft.com/office/drawing/2014/main" id="{AA3608CF-488E-4456-9682-B08AD71E702A}"/>
+              </a:ext>
+            </a:extLst>
+          </p:cNvPr>
+          <p:cNvSpPr>
+            <a:spLocks xmlns:a="http://schemas.openxmlformats.org/drawingml/2006/main" noGrp="1"/>
+          </p:cNvSpPr>
+          <p:nvPr/>
+        </p:nvSpPr>
+        <p:spPr>
+          <a:xfrm xmlns:a="http://schemas.openxmlformats.org/drawingml/2006/main">
+            <a:off x="857250" y="1219200"/>
+            <a:ext cx="10477500" cy="742950"/>
           </a:xfrm>
           <a:prstGeom xmlns:a="http://schemas.openxmlformats.org/drawingml/2006/main" prst="rect">
             <a:avLst/>
@@ -8239,7 +8239,7 @@
           <a:lstStyle xmlns:a="http://schemas.openxmlformats.org/drawingml/2006/main"/>
           <a:p xmlns:a="http://schemas.openxmlformats.org/drawingml/2006/main">
             <a:pPr algn="ctr">
-              <a:defRPr sz="2175" b="1">
+              <a:defRPr sz="2100" b="1">
                 <a:solidFill>
                   <a:srgbClr val="17253A"/>
                 </a:solidFill>
@@ -8249,7 +8249,7 @@
               </a:defRPr>
             </a:pPr>
             <a:r>
-              <a:rPr sz="2175" b="1">
+              <a:rPr sz="2100" b="1">
                 <a:solidFill>
                   <a:srgbClr val="17253A"/>
                 </a:solidFill>
@@ -8267,28 +8267,30 @@
           <p:cNvPr id="11" name="">
             <a:extLst xmlns:a="http://schemas.openxmlformats.org/drawingml/2006/main">
               <a:ext uri="{FF2B5EF4-FFF2-40B4-BE49-F238E27FC236}">
-                <a16:creationId xmlns:a16="http://schemas.microsoft.com/office/drawing/2014/main" id="{F3F76E65-E39D-4D9D-B2C7-7CB9CF252F56}"/>
-              </a:ext>
-            </a:extLst>
-          </p:cNvPr>
-          <p:cNvSpPr>
-            <a:spLocks xmlns:a="http://schemas.openxmlformats.org/drawingml/2006/main" noGrp="1"/>
-          </p:cNvSpPr>
-          <p:nvPr/>
-        </p:nvSpPr>
-        <p:spPr>
-          <a:xfrm xmlns:a="http://schemas.openxmlformats.org/drawingml/2006/main">
-            <a:off x="1000125" y="2247900"/>
-            <a:ext cx="476250" cy="476250"/>
-          </a:xfrm>
-          <a:prstGeom xmlns:a="http://schemas.openxmlformats.org/drawingml/2006/main" prst="ellipse">
+                <a16:creationId xmlns:a16="http://schemas.microsoft.com/office/drawing/2014/main" id="{D18FF867-BCC8-4F37-8E46-2ECFD879399B}"/>
+              </a:ext>
+            </a:extLst>
+          </p:cNvPr>
+          <p:cNvSpPr>
+            <a:spLocks xmlns:a="http://schemas.openxmlformats.org/drawingml/2006/main" noGrp="1"/>
+          </p:cNvSpPr>
+          <p:nvPr/>
+        </p:nvSpPr>
+        <p:spPr>
+          <a:xfrm xmlns:a="http://schemas.openxmlformats.org/drawingml/2006/main">
+            <a:off x="971550" y="2124075"/>
+            <a:ext cx="38100" cy="3524250"/>
+          </a:xfrm>
+          <a:prstGeom xmlns:a="http://schemas.openxmlformats.org/drawingml/2006/main" prst="rect">
             <a:avLst/>
           </a:prstGeom>
           <a:solidFill xmlns:a="http://schemas.openxmlformats.org/drawingml/2006/main">
-            <a:srgbClr val="18324A"/>
+            <a:srgbClr val="2C6E73"/>
           </a:solidFill>
           <a:ln xmlns:a="http://schemas.openxmlformats.org/drawingml/2006/main" w="0">
-            <a:noFill/>
+            <a:solidFill>
+              <a:srgbClr val="2C6E73"/>
+            </a:solidFill>
           </a:ln>
         </p:spPr>
       </p:sp>
@@ -8297,19 +8299,19 @@
           <p:cNvPr id="12" name="">
             <a:extLst xmlns:a="http://schemas.openxmlformats.org/drawingml/2006/main">
               <a:ext uri="{FF2B5EF4-FFF2-40B4-BE49-F238E27FC236}">
-                <a16:creationId xmlns:a16="http://schemas.microsoft.com/office/drawing/2014/main" id="{E4B702D6-6376-485E-89C2-8AF659C737C0}"/>
-              </a:ext>
-            </a:extLst>
-          </p:cNvPr>
-          <p:cNvSpPr>
-            <a:spLocks xmlns:a="http://schemas.openxmlformats.org/drawingml/2006/main" noGrp="1"/>
-          </p:cNvSpPr>
-          <p:nvPr/>
-        </p:nvSpPr>
-        <p:spPr>
-          <a:xfrm xmlns:a="http://schemas.openxmlformats.org/drawingml/2006/main">
-            <a:off x="1000125" y="2276475"/>
-            <a:ext cx="476250" cy="419100"/>
+                <a16:creationId xmlns:a16="http://schemas.microsoft.com/office/drawing/2014/main" id="{A1A3CF18-220D-4D10-8C02-1B80F783D7AC}"/>
+              </a:ext>
+            </a:extLst>
+          </p:cNvPr>
+          <p:cNvSpPr>
+            <a:spLocks xmlns:a="http://schemas.openxmlformats.org/drawingml/2006/main" noGrp="1"/>
+          </p:cNvSpPr>
+          <p:nvPr/>
+        </p:nvSpPr>
+        <p:spPr>
+          <a:xfrm xmlns:a="http://schemas.openxmlformats.org/drawingml/2006/main">
+            <a:off x="1162050" y="2200275"/>
+            <a:ext cx="400050" cy="400050"/>
           </a:xfrm>
           <a:prstGeom xmlns:a="http://schemas.openxmlformats.org/drawingml/2006/main" prst="rect">
             <a:avLst/>
@@ -8326,9 +8328,9 @@
           <a:lstStyle xmlns:a="http://schemas.openxmlformats.org/drawingml/2006/main"/>
           <a:p xmlns:a="http://schemas.openxmlformats.org/drawingml/2006/main">
             <a:pPr algn="ctr">
-              <a:defRPr sz="1350" b="1">
-                <a:solidFill>
-                  <a:srgbClr val="FFFFFF"/>
+              <a:defRPr sz="1125" b="1">
+                <a:solidFill>
+                  <a:srgbClr val="2C6E73"/>
                 </a:solidFill>
                 <a:latin typeface="Arial"/>
                 <a:ea typeface="Arial"/>
@@ -8336,9 +8338,9 @@
               </a:defRPr>
             </a:pPr>
             <a:r>
-              <a:rPr sz="1350" b="1">
-                <a:solidFill>
-                  <a:srgbClr val="FFFFFF"/>
+              <a:rPr sz="1125" b="1">
+                <a:solidFill>
+                  <a:srgbClr val="2C6E73"/>
                 </a:solidFill>
                 <a:latin typeface="Arial"/>
                 <a:ea typeface="Arial"/>
@@ -8354,19 +8356,19 @@
           <p:cNvPr id="13" name="">
             <a:extLst xmlns:a="http://schemas.openxmlformats.org/drawingml/2006/main">
               <a:ext uri="{FF2B5EF4-FFF2-40B4-BE49-F238E27FC236}">
-                <a16:creationId xmlns:a16="http://schemas.microsoft.com/office/drawing/2014/main" id="{DDD6F16C-9AE3-4469-B063-60DED48CBF53}"/>
-              </a:ext>
-            </a:extLst>
-          </p:cNvPr>
-          <p:cNvSpPr>
-            <a:spLocks xmlns:a="http://schemas.openxmlformats.org/drawingml/2006/main" noGrp="1"/>
-          </p:cNvSpPr>
-          <p:nvPr/>
-        </p:nvSpPr>
-        <p:spPr>
-          <a:xfrm xmlns:a="http://schemas.openxmlformats.org/drawingml/2006/main">
-            <a:off x="1714500" y="2181225"/>
-            <a:ext cx="9429750" cy="609600"/>
+                <a16:creationId xmlns:a16="http://schemas.microsoft.com/office/drawing/2014/main" id="{6528967A-AD76-4C42-8B21-7820BA19B55E}"/>
+              </a:ext>
+            </a:extLst>
+          </p:cNvPr>
+          <p:cNvSpPr>
+            <a:spLocks xmlns:a="http://schemas.openxmlformats.org/drawingml/2006/main" noGrp="1"/>
+          </p:cNvSpPr>
+          <p:nvPr/>
+        </p:nvSpPr>
+        <p:spPr>
+          <a:xfrm xmlns:a="http://schemas.openxmlformats.org/drawingml/2006/main">
+            <a:off x="1714500" y="2114550"/>
+            <a:ext cx="9525000" cy="809625"/>
           </a:xfrm>
           <a:prstGeom xmlns:a="http://schemas.openxmlformats.org/drawingml/2006/main" prst="rect">
             <a:avLst/>
@@ -8383,7 +8385,7 @@
           <a:lstStyle xmlns:a="http://schemas.openxmlformats.org/drawingml/2006/main"/>
           <a:p xmlns:a="http://schemas.openxmlformats.org/drawingml/2006/main">
             <a:pPr algn="l">
-              <a:defRPr sz="1500" b="0">
+              <a:defRPr sz="1725" b="0">
                 <a:solidFill>
                   <a:srgbClr val="17253A"/>
                 </a:solidFill>
@@ -8393,7 +8395,7 @@
               </a:defRPr>
             </a:pPr>
             <a:r>
-              <a:rPr sz="1500" b="0">
+              <a:rPr sz="1725" b="0">
                 <a:solidFill>
                   <a:srgbClr val="17253A"/>
                 </a:solidFill>
@@ -8401,7 +8403,7 @@
                 <a:ea typeface="Arial"/>
                 <a:cs typeface="Arial"/>
               </a:rPr>
-              <a:t>Identify the structure: Read the number in three-digit periods from left to right.</a:t>
+              <a:t>3,804,215 - 398,760</a:t>
             </a:r>
           </a:p>
         </p:txBody>
@@ -8411,28 +8413,30 @@
           <p:cNvPr id="14" name="">
             <a:extLst xmlns:a="http://schemas.openxmlformats.org/drawingml/2006/main">
               <a:ext uri="{FF2B5EF4-FFF2-40B4-BE49-F238E27FC236}">
-                <a16:creationId xmlns:a16="http://schemas.microsoft.com/office/drawing/2014/main" id="{2697F35C-95A8-45A6-974F-CF770A98FA48}"/>
-              </a:ext>
-            </a:extLst>
-          </p:cNvPr>
-          <p:cNvSpPr>
-            <a:spLocks xmlns:a="http://schemas.openxmlformats.org/drawingml/2006/main" noGrp="1"/>
-          </p:cNvSpPr>
-          <p:nvPr/>
-        </p:nvSpPr>
-        <p:spPr>
-          <a:xfrm xmlns:a="http://schemas.openxmlformats.org/drawingml/2006/main">
-            <a:off x="1000125" y="2990850"/>
-            <a:ext cx="476250" cy="476250"/>
-          </a:xfrm>
-          <a:prstGeom xmlns:a="http://schemas.openxmlformats.org/drawingml/2006/main" prst="ellipse">
+                <a16:creationId xmlns:a16="http://schemas.microsoft.com/office/drawing/2014/main" id="{B0D95AE0-A289-4AE6-AE39-24B18C9A4353}"/>
+              </a:ext>
+            </a:extLst>
+          </p:cNvPr>
+          <p:cNvSpPr>
+            <a:spLocks xmlns:a="http://schemas.openxmlformats.org/drawingml/2006/main" noGrp="1"/>
+          </p:cNvSpPr>
+          <p:nvPr/>
+        </p:nvSpPr>
+        <p:spPr>
+          <a:xfrm xmlns:a="http://schemas.openxmlformats.org/drawingml/2006/main">
+            <a:off x="1714500" y="2943225"/>
+            <a:ext cx="9334500" cy="9525"/>
+          </a:xfrm>
+          <a:prstGeom xmlns:a="http://schemas.openxmlformats.org/drawingml/2006/main" prst="rect">
             <a:avLst/>
           </a:prstGeom>
           <a:solidFill xmlns:a="http://schemas.openxmlformats.org/drawingml/2006/main">
-            <a:srgbClr val="2C6E73"/>
+            <a:srgbClr val="D9E0E6"/>
           </a:solidFill>
           <a:ln xmlns:a="http://schemas.openxmlformats.org/drawingml/2006/main" w="0">
-            <a:noFill/>
+            <a:solidFill>
+              <a:srgbClr val="D9E0E6"/>
+            </a:solidFill>
           </a:ln>
         </p:spPr>
       </p:sp>
@@ -8441,19 +8445,19 @@
           <p:cNvPr id="15" name="">
             <a:extLst xmlns:a="http://schemas.openxmlformats.org/drawingml/2006/main">
               <a:ext uri="{FF2B5EF4-FFF2-40B4-BE49-F238E27FC236}">
-                <a16:creationId xmlns:a16="http://schemas.microsoft.com/office/drawing/2014/main" id="{70B19EF0-392C-40C1-ADF2-55EEC83B4293}"/>
-              </a:ext>
-            </a:extLst>
-          </p:cNvPr>
-          <p:cNvSpPr>
-            <a:spLocks xmlns:a="http://schemas.openxmlformats.org/drawingml/2006/main" noGrp="1"/>
-          </p:cNvSpPr>
-          <p:nvPr/>
-        </p:nvSpPr>
-        <p:spPr>
-          <a:xfrm xmlns:a="http://schemas.openxmlformats.org/drawingml/2006/main">
-            <a:off x="1000125" y="3019425"/>
-            <a:ext cx="476250" cy="419100"/>
+                <a16:creationId xmlns:a16="http://schemas.microsoft.com/office/drawing/2014/main" id="{2DD7D840-0421-45CB-82BC-B9FD8B0B6B7D}"/>
+              </a:ext>
+            </a:extLst>
+          </p:cNvPr>
+          <p:cNvSpPr>
+            <a:spLocks xmlns:a="http://schemas.openxmlformats.org/drawingml/2006/main" noGrp="1"/>
+          </p:cNvSpPr>
+          <p:nvPr/>
+        </p:nvSpPr>
+        <p:spPr>
+          <a:xfrm xmlns:a="http://schemas.openxmlformats.org/drawingml/2006/main">
+            <a:off x="1162050" y="3076575"/>
+            <a:ext cx="400050" cy="400050"/>
           </a:xfrm>
           <a:prstGeom xmlns:a="http://schemas.openxmlformats.org/drawingml/2006/main" prst="rect">
             <a:avLst/>
@@ -8470,9 +8474,9 @@
           <a:lstStyle xmlns:a="http://schemas.openxmlformats.org/drawingml/2006/main"/>
           <a:p xmlns:a="http://schemas.openxmlformats.org/drawingml/2006/main">
             <a:pPr algn="ctr">
-              <a:defRPr sz="1350" b="1">
-                <a:solidFill>
-                  <a:srgbClr val="FFFFFF"/>
+              <a:defRPr sz="1125" b="1">
+                <a:solidFill>
+                  <a:srgbClr val="2C6E73"/>
                 </a:solidFill>
                 <a:latin typeface="Arial"/>
                 <a:ea typeface="Arial"/>
@@ -8480,9 +8484,9 @@
               </a:defRPr>
             </a:pPr>
             <a:r>
-              <a:rPr sz="1350" b="1">
-                <a:solidFill>
-                  <a:srgbClr val="FFFFFF"/>
+              <a:rPr sz="1125" b="1">
+                <a:solidFill>
+                  <a:srgbClr val="2C6E73"/>
                 </a:solidFill>
                 <a:latin typeface="Arial"/>
                 <a:ea typeface="Arial"/>
@@ -8498,19 +8502,19 @@
           <p:cNvPr id="16" name="">
             <a:extLst xmlns:a="http://schemas.openxmlformats.org/drawingml/2006/main">
               <a:ext uri="{FF2B5EF4-FFF2-40B4-BE49-F238E27FC236}">
-                <a16:creationId xmlns:a16="http://schemas.microsoft.com/office/drawing/2014/main" id="{E9720C90-A54D-4409-9074-D345C828E0A4}"/>
-              </a:ext>
-            </a:extLst>
-          </p:cNvPr>
-          <p:cNvSpPr>
-            <a:spLocks xmlns:a="http://schemas.openxmlformats.org/drawingml/2006/main" noGrp="1"/>
-          </p:cNvSpPr>
-          <p:nvPr/>
-        </p:nvSpPr>
-        <p:spPr>
-          <a:xfrm xmlns:a="http://schemas.openxmlformats.org/drawingml/2006/main">
-            <a:off x="1714500" y="2924175"/>
-            <a:ext cx="9429750" cy="609600"/>
+                <a16:creationId xmlns:a16="http://schemas.microsoft.com/office/drawing/2014/main" id="{EB18BCFA-591E-4EC3-ADA6-4F7E2E0CEF5B}"/>
+              </a:ext>
+            </a:extLst>
+          </p:cNvPr>
+          <p:cNvSpPr>
+            <a:spLocks xmlns:a="http://schemas.openxmlformats.org/drawingml/2006/main" noGrp="1"/>
+          </p:cNvSpPr>
+          <p:nvPr/>
+        </p:nvSpPr>
+        <p:spPr>
+          <a:xfrm xmlns:a="http://schemas.openxmlformats.org/drawingml/2006/main">
+            <a:off x="1714500" y="2990850"/>
+            <a:ext cx="9525000" cy="809625"/>
           </a:xfrm>
           <a:prstGeom xmlns:a="http://schemas.openxmlformats.org/drawingml/2006/main" prst="rect">
             <a:avLst/>
@@ -8527,7 +8531,7 @@
           <a:lstStyle xmlns:a="http://schemas.openxmlformats.org/drawingml/2006/main"/>
           <a:p xmlns:a="http://schemas.openxmlformats.org/drawingml/2006/main">
             <a:pPr algn="l">
-              <a:defRPr sz="1500" b="0">
+              <a:defRPr sz="1725" b="0">
                 <a:solidFill>
                   <a:srgbClr val="17253A"/>
                 </a:solidFill>
@@ -8537,7 +8541,7 @@
               </a:defRPr>
             </a:pPr>
             <a:r>
-              <a:rPr sz="1500" b="0">
+              <a:rPr sz="1725" b="0">
                 <a:solidFill>
                   <a:srgbClr val="17253A"/>
                 </a:solidFill>
@@ -8545,7 +8549,7 @@
                 <a:ea typeface="Arial"/>
                 <a:cs typeface="Arial"/>
               </a:rPr>
-              <a:t>Set up the method: Record each digit in the correct place-value column.</a:t>
+              <a:t>3,804,215 - 400,000 = 3,404,215</a:t>
             </a:r>
           </a:p>
         </p:txBody>
@@ -8555,28 +8559,30 @@
           <p:cNvPr id="17" name="">
             <a:extLst xmlns:a="http://schemas.openxmlformats.org/drawingml/2006/main">
               <a:ext uri="{FF2B5EF4-FFF2-40B4-BE49-F238E27FC236}">
-                <a16:creationId xmlns:a16="http://schemas.microsoft.com/office/drawing/2014/main" id="{9FB1D1FE-62B2-49E7-9E20-D0BB97DEE713}"/>
-              </a:ext>
-            </a:extLst>
-          </p:cNvPr>
-          <p:cNvSpPr>
-            <a:spLocks xmlns:a="http://schemas.openxmlformats.org/drawingml/2006/main" noGrp="1"/>
-          </p:cNvSpPr>
-          <p:nvPr/>
-        </p:nvSpPr>
-        <p:spPr>
-          <a:xfrm xmlns:a="http://schemas.openxmlformats.org/drawingml/2006/main">
-            <a:off x="1000125" y="3733800"/>
-            <a:ext cx="476250" cy="476250"/>
-          </a:xfrm>
-          <a:prstGeom xmlns:a="http://schemas.openxmlformats.org/drawingml/2006/main" prst="ellipse">
+                <a16:creationId xmlns:a16="http://schemas.microsoft.com/office/drawing/2014/main" id="{A02DF3C7-F529-48F6-9DB1-3B05E3702D16}"/>
+              </a:ext>
+            </a:extLst>
+          </p:cNvPr>
+          <p:cNvSpPr>
+            <a:spLocks xmlns:a="http://schemas.openxmlformats.org/drawingml/2006/main" noGrp="1"/>
+          </p:cNvSpPr>
+          <p:nvPr/>
+        </p:nvSpPr>
+        <p:spPr>
+          <a:xfrm xmlns:a="http://schemas.openxmlformats.org/drawingml/2006/main">
+            <a:off x="1714500" y="3819525"/>
+            <a:ext cx="9334500" cy="9525"/>
+          </a:xfrm>
+          <a:prstGeom xmlns:a="http://schemas.openxmlformats.org/drawingml/2006/main" prst="rect">
             <a:avLst/>
           </a:prstGeom>
           <a:solidFill xmlns:a="http://schemas.openxmlformats.org/drawingml/2006/main">
-            <a:srgbClr val="2C6E73"/>
+            <a:srgbClr val="D9E0E6"/>
           </a:solidFill>
           <a:ln xmlns:a="http://schemas.openxmlformats.org/drawingml/2006/main" w="0">
-            <a:noFill/>
+            <a:solidFill>
+              <a:srgbClr val="D9E0E6"/>
+            </a:solidFill>
           </a:ln>
         </p:spPr>
       </p:sp>
@@ -8585,19 +8591,19 @@
           <p:cNvPr id="18" name="">
             <a:extLst xmlns:a="http://schemas.openxmlformats.org/drawingml/2006/main">
               <a:ext uri="{FF2B5EF4-FFF2-40B4-BE49-F238E27FC236}">
-                <a16:creationId xmlns:a16="http://schemas.microsoft.com/office/drawing/2014/main" id="{863F36AB-DB25-408E-B953-0C39EB0F1F58}"/>
-              </a:ext>
-            </a:extLst>
-          </p:cNvPr>
-          <p:cNvSpPr>
-            <a:spLocks xmlns:a="http://schemas.openxmlformats.org/drawingml/2006/main" noGrp="1"/>
-          </p:cNvSpPr>
-          <p:nvPr/>
-        </p:nvSpPr>
-        <p:spPr>
-          <a:xfrm xmlns:a="http://schemas.openxmlformats.org/drawingml/2006/main">
-            <a:off x="1000125" y="3762375"/>
-            <a:ext cx="476250" cy="419100"/>
+                <a16:creationId xmlns:a16="http://schemas.microsoft.com/office/drawing/2014/main" id="{65496BE0-61C4-4A12-A2C1-9DCB650FE672}"/>
+              </a:ext>
+            </a:extLst>
+          </p:cNvPr>
+          <p:cNvSpPr>
+            <a:spLocks xmlns:a="http://schemas.openxmlformats.org/drawingml/2006/main" noGrp="1"/>
+          </p:cNvSpPr>
+          <p:nvPr/>
+        </p:nvSpPr>
+        <p:spPr>
+          <a:xfrm xmlns:a="http://schemas.openxmlformats.org/drawingml/2006/main">
+            <a:off x="1162050" y="3952875"/>
+            <a:ext cx="400050" cy="400050"/>
           </a:xfrm>
           <a:prstGeom xmlns:a="http://schemas.openxmlformats.org/drawingml/2006/main" prst="rect">
             <a:avLst/>
@@ -8614,9 +8620,9 @@
           <a:lstStyle xmlns:a="http://schemas.openxmlformats.org/drawingml/2006/main"/>
           <a:p xmlns:a="http://schemas.openxmlformats.org/drawingml/2006/main">
             <a:pPr algn="ctr">
-              <a:defRPr sz="1350" b="1">
-                <a:solidFill>
-                  <a:srgbClr val="FFFFFF"/>
+              <a:defRPr sz="1125" b="1">
+                <a:solidFill>
+                  <a:srgbClr val="2C6E73"/>
                 </a:solidFill>
                 <a:latin typeface="Arial"/>
                 <a:ea typeface="Arial"/>
@@ -8624,9 +8630,9 @@
               </a:defRPr>
             </a:pPr>
             <a:r>
-              <a:rPr sz="1350" b="1">
-                <a:solidFill>
-                  <a:srgbClr val="FFFFFF"/>
+              <a:rPr sz="1125" b="1">
+                <a:solidFill>
+                  <a:srgbClr val="2C6E73"/>
                 </a:solidFill>
                 <a:latin typeface="Arial"/>
                 <a:ea typeface="Arial"/>
@@ -8642,19 +8648,19 @@
           <p:cNvPr id="19" name="">
             <a:extLst xmlns:a="http://schemas.openxmlformats.org/drawingml/2006/main">
               <a:ext uri="{FF2B5EF4-FFF2-40B4-BE49-F238E27FC236}">
-                <a16:creationId xmlns:a16="http://schemas.microsoft.com/office/drawing/2014/main" id="{125E97B0-9F4D-416E-80FA-DC8B84A165F4}"/>
-              </a:ext>
-            </a:extLst>
-          </p:cNvPr>
-          <p:cNvSpPr>
-            <a:spLocks xmlns:a="http://schemas.openxmlformats.org/drawingml/2006/main" noGrp="1"/>
-          </p:cNvSpPr>
-          <p:nvPr/>
-        </p:nvSpPr>
-        <p:spPr>
-          <a:xfrm xmlns:a="http://schemas.openxmlformats.org/drawingml/2006/main">
-            <a:off x="1714500" y="3667125"/>
-            <a:ext cx="9429750" cy="609600"/>
+                <a16:creationId xmlns:a16="http://schemas.microsoft.com/office/drawing/2014/main" id="{E7820410-0BB9-4594-84DF-6DFF0F401979}"/>
+              </a:ext>
+            </a:extLst>
+          </p:cNvPr>
+          <p:cNvSpPr>
+            <a:spLocks xmlns:a="http://schemas.openxmlformats.org/drawingml/2006/main" noGrp="1"/>
+          </p:cNvSpPr>
+          <p:nvPr/>
+        </p:nvSpPr>
+        <p:spPr>
+          <a:xfrm xmlns:a="http://schemas.openxmlformats.org/drawingml/2006/main">
+            <a:off x="1714500" y="3867150"/>
+            <a:ext cx="9525000" cy="809625"/>
           </a:xfrm>
           <a:prstGeom xmlns:a="http://schemas.openxmlformats.org/drawingml/2006/main" prst="rect">
             <a:avLst/>
@@ -8671,7 +8677,7 @@
           <a:lstStyle xmlns:a="http://schemas.openxmlformats.org/drawingml/2006/main"/>
           <a:p xmlns:a="http://schemas.openxmlformats.org/drawingml/2006/main">
             <a:pPr algn="l">
-              <a:defRPr sz="1500" b="0">
+              <a:defRPr sz="1725" b="0">
                 <a:solidFill>
                   <a:srgbClr val="17253A"/>
                 </a:solidFill>
@@ -8681,7 +8687,7 @@
               </a:defRPr>
             </a:pPr>
             <a:r>
-              <a:rPr sz="1500" b="0">
+              <a:rPr sz="1725" b="0">
                 <a:solidFill>
                   <a:srgbClr val="17253A"/>
                 </a:solidFill>
@@ -8689,7 +8695,7 @@
                 <a:ea typeface="Arial"/>
                 <a:cs typeface="Arial"/>
               </a:rPr>
-              <a:t>Complete the calculation: 3,405,455.</a:t>
+              <a:t>398,760 is 1,240 less than 400,000</a:t>
             </a:r>
           </a:p>
         </p:txBody>
@@ -8699,28 +8705,30 @@
           <p:cNvPr id="20" name="">
             <a:extLst xmlns:a="http://schemas.openxmlformats.org/drawingml/2006/main">
               <a:ext uri="{FF2B5EF4-FFF2-40B4-BE49-F238E27FC236}">
-                <a16:creationId xmlns:a16="http://schemas.microsoft.com/office/drawing/2014/main" id="{1EE12F3A-CF33-42E7-84A7-AC79786E9FB9}"/>
-              </a:ext>
-            </a:extLst>
-          </p:cNvPr>
-          <p:cNvSpPr>
-            <a:spLocks xmlns:a="http://schemas.openxmlformats.org/drawingml/2006/main" noGrp="1"/>
-          </p:cNvSpPr>
-          <p:nvPr/>
-        </p:nvSpPr>
-        <p:spPr>
-          <a:xfrm xmlns:a="http://schemas.openxmlformats.org/drawingml/2006/main">
-            <a:off x="1000125" y="4476750"/>
-            <a:ext cx="476250" cy="476250"/>
-          </a:xfrm>
-          <a:prstGeom xmlns:a="http://schemas.openxmlformats.org/drawingml/2006/main" prst="ellipse">
+                <a16:creationId xmlns:a16="http://schemas.microsoft.com/office/drawing/2014/main" id="{BB04F320-57DE-466F-BCFB-8B3AA7755DBC}"/>
+              </a:ext>
+            </a:extLst>
+          </p:cNvPr>
+          <p:cNvSpPr>
+            <a:spLocks xmlns:a="http://schemas.openxmlformats.org/drawingml/2006/main" noGrp="1"/>
+          </p:cNvSpPr>
+          <p:nvPr/>
+        </p:nvSpPr>
+        <p:spPr>
+          <a:xfrm xmlns:a="http://schemas.openxmlformats.org/drawingml/2006/main">
+            <a:off x="1714500" y="4695825"/>
+            <a:ext cx="9334500" cy="9525"/>
+          </a:xfrm>
+          <a:prstGeom xmlns:a="http://schemas.openxmlformats.org/drawingml/2006/main" prst="rect">
             <a:avLst/>
           </a:prstGeom>
           <a:solidFill xmlns:a="http://schemas.openxmlformats.org/drawingml/2006/main">
-            <a:srgbClr val="2C6E73"/>
+            <a:srgbClr val="D9E0E6"/>
           </a:solidFill>
           <a:ln xmlns:a="http://schemas.openxmlformats.org/drawingml/2006/main" w="0">
-            <a:noFill/>
+            <a:solidFill>
+              <a:srgbClr val="D9E0E6"/>
+            </a:solidFill>
           </a:ln>
         </p:spPr>
       </p:sp>
@@ -8729,19 +8737,19 @@
           <p:cNvPr id="21" name="">
             <a:extLst xmlns:a="http://schemas.openxmlformats.org/drawingml/2006/main">
               <a:ext uri="{FF2B5EF4-FFF2-40B4-BE49-F238E27FC236}">
-                <a16:creationId xmlns:a16="http://schemas.microsoft.com/office/drawing/2014/main" id="{74CDAAAD-2AA0-45A4-B819-AB7AF69F2754}"/>
-              </a:ext>
-            </a:extLst>
-          </p:cNvPr>
-          <p:cNvSpPr>
-            <a:spLocks xmlns:a="http://schemas.openxmlformats.org/drawingml/2006/main" noGrp="1"/>
-          </p:cNvSpPr>
-          <p:nvPr/>
-        </p:nvSpPr>
-        <p:spPr>
-          <a:xfrm xmlns:a="http://schemas.openxmlformats.org/drawingml/2006/main">
-            <a:off x="1000125" y="4505325"/>
-            <a:ext cx="476250" cy="419100"/>
+                <a16:creationId xmlns:a16="http://schemas.microsoft.com/office/drawing/2014/main" id="{9FFDB2FE-B9E3-4637-8C24-4BC78EFC1878}"/>
+              </a:ext>
+            </a:extLst>
+          </p:cNvPr>
+          <p:cNvSpPr>
+            <a:spLocks xmlns:a="http://schemas.openxmlformats.org/drawingml/2006/main" noGrp="1"/>
+          </p:cNvSpPr>
+          <p:nvPr/>
+        </p:nvSpPr>
+        <p:spPr>
+          <a:xfrm xmlns:a="http://schemas.openxmlformats.org/drawingml/2006/main">
+            <a:off x="1162050" y="4829175"/>
+            <a:ext cx="400050" cy="400050"/>
           </a:xfrm>
           <a:prstGeom xmlns:a="http://schemas.openxmlformats.org/drawingml/2006/main" prst="rect">
             <a:avLst/>
@@ -8758,9 +8766,9 @@
           <a:lstStyle xmlns:a="http://schemas.openxmlformats.org/drawingml/2006/main"/>
           <a:p xmlns:a="http://schemas.openxmlformats.org/drawingml/2006/main">
             <a:pPr algn="ctr">
-              <a:defRPr sz="1350" b="1">
-                <a:solidFill>
-                  <a:srgbClr val="FFFFFF"/>
+              <a:defRPr sz="1125" b="1">
+                <a:solidFill>
+                  <a:srgbClr val="2F785D"/>
                 </a:solidFill>
                 <a:latin typeface="Arial"/>
                 <a:ea typeface="Arial"/>
@@ -8768,9 +8776,9 @@
               </a:defRPr>
             </a:pPr>
             <a:r>
-              <a:rPr sz="1350" b="1">
-                <a:solidFill>
-                  <a:srgbClr val="FFFFFF"/>
+              <a:rPr sz="1125" b="1">
+                <a:solidFill>
+                  <a:srgbClr val="2F785D"/>
                 </a:solidFill>
                 <a:latin typeface="Arial"/>
                 <a:ea typeface="Arial"/>
@@ -8786,19 +8794,19 @@
           <p:cNvPr id="22" name="">
             <a:extLst xmlns:a="http://schemas.openxmlformats.org/drawingml/2006/main">
               <a:ext uri="{FF2B5EF4-FFF2-40B4-BE49-F238E27FC236}">
-                <a16:creationId xmlns:a16="http://schemas.microsoft.com/office/drawing/2014/main" id="{BF3B1F6F-AD83-4209-9851-AE026856FC85}"/>
-              </a:ext>
-            </a:extLst>
-          </p:cNvPr>
-          <p:cNvSpPr>
-            <a:spLocks xmlns:a="http://schemas.openxmlformats.org/drawingml/2006/main" noGrp="1"/>
-          </p:cNvSpPr>
-          <p:nvPr/>
-        </p:nvSpPr>
-        <p:spPr>
-          <a:xfrm xmlns:a="http://schemas.openxmlformats.org/drawingml/2006/main">
-            <a:off x="1714500" y="4410075"/>
-            <a:ext cx="9429750" cy="609600"/>
+                <a16:creationId xmlns:a16="http://schemas.microsoft.com/office/drawing/2014/main" id="{0C7F8FE4-CB54-4D26-B104-AB6BF3EE18A0}"/>
+              </a:ext>
+            </a:extLst>
+          </p:cNvPr>
+          <p:cNvSpPr>
+            <a:spLocks xmlns:a="http://schemas.openxmlformats.org/drawingml/2006/main" noGrp="1"/>
+          </p:cNvSpPr>
+          <p:nvPr/>
+        </p:nvSpPr>
+        <p:spPr>
+          <a:xfrm xmlns:a="http://schemas.openxmlformats.org/drawingml/2006/main">
+            <a:off x="1714500" y="4743450"/>
+            <a:ext cx="9525000" cy="809625"/>
           </a:xfrm>
           <a:prstGeom xmlns:a="http://schemas.openxmlformats.org/drawingml/2006/main" prst="rect">
             <a:avLst/>
@@ -8815,7 +8823,7 @@
           <a:lstStyle xmlns:a="http://schemas.openxmlformats.org/drawingml/2006/main"/>
           <a:p xmlns:a="http://schemas.openxmlformats.org/drawingml/2006/main">
             <a:pPr algn="l">
-              <a:defRPr sz="1500" b="1">
+              <a:defRPr sz="1725" b="1">
                 <a:solidFill>
                   <a:srgbClr val="2F785D"/>
                 </a:solidFill>
@@ -8825,7 +8833,7 @@
               </a:defRPr>
             </a:pPr>
             <a:r>
-              <a:rPr sz="1500" b="1">
+              <a:rPr sz="1725" b="1">
                 <a:solidFill>
                   <a:srgbClr val="2F785D"/>
                 </a:solidFill>
@@ -8833,7 +8841,7 @@
                 <a:ea typeface="Arial"/>
                 <a:cs typeface="Arial"/>
               </a:rPr>
-              <a:t>Check the result: Check the value of every zero and compare from the greatest place.</a:t>
+              <a:t>3,404,215 + 1,240 = 3,405,455</a:t>
             </a:r>
           </a:p>
         </p:txBody>
@@ -8841,7 +8849,7 @@
     </p:spTree>
     <p:extLst>
       <p:ext uri="{BB962C8B-B14F-4D97-AF65-F5344CB8AC3E}">
-        <p14:creationId xmlns:p14="http://schemas.microsoft.com/office/powerpoint/2010/main" val="1513973507"/>
+        <p14:creationId xmlns:p14="http://schemas.microsoft.com/office/powerpoint/2010/main" val="1198603867"/>
       </p:ext>
     </p:extLst>
   </p:cSld>
@@ -9134,7 +9142,7 @@
           <p:cNvPr id="15" name="">
             <a:extLst xmlns:a="http://schemas.openxmlformats.org/drawingml/2006/main">
               <a:ext uri="{FF2B5EF4-FFF2-40B4-BE49-F238E27FC236}">
-                <a16:creationId xmlns:a16="http://schemas.microsoft.com/office/drawing/2014/main" id="{98C3420E-1C16-4B1D-A349-FC47178ABABA}"/>
+                <a16:creationId xmlns:a16="http://schemas.microsoft.com/office/drawing/2014/main" id="{DBC9DA34-9A98-4968-846A-565B8925FA22}"/>
               </a:ext>
             </a:extLst>
           </p:cNvPr>
@@ -9166,7 +9174,7 @@
           <p:cNvPr id="2" name="">
             <a:extLst xmlns:a="http://schemas.openxmlformats.org/drawingml/2006/main">
               <a:ext uri="{FF2B5EF4-FFF2-40B4-BE49-F238E27FC236}">
-                <a16:creationId xmlns:a16="http://schemas.microsoft.com/office/drawing/2014/main" id="{B22DDF77-FCE4-40FA-B0FD-B3199B3B06B1}"/>
+                <a16:creationId xmlns:a16="http://schemas.microsoft.com/office/drawing/2014/main" id="{999C4FA1-0DC4-4519-ABE7-03FF1A2D10F8}"/>
               </a:ext>
             </a:extLst>
           </p:cNvPr>
@@ -9223,7 +9231,7 @@
           <p:cNvPr id="3" name="">
             <a:extLst xmlns:a="http://schemas.openxmlformats.org/drawingml/2006/main">
               <a:ext uri="{FF2B5EF4-FFF2-40B4-BE49-F238E27FC236}">
-                <a16:creationId xmlns:a16="http://schemas.microsoft.com/office/drawing/2014/main" id="{9669AE58-6C0C-4C46-9085-9EDB1080B9AC}"/>
+                <a16:creationId xmlns:a16="http://schemas.microsoft.com/office/drawing/2014/main" id="{9677CB00-7A5A-4AA7-B802-DC256636EFB0}"/>
               </a:ext>
             </a:extLst>
           </p:cNvPr>
@@ -9255,7 +9263,7 @@
           <p:cNvPr id="4" name="">
             <a:extLst xmlns:a="http://schemas.openxmlformats.org/drawingml/2006/main">
               <a:ext uri="{FF2B5EF4-FFF2-40B4-BE49-F238E27FC236}">
-                <a16:creationId xmlns:a16="http://schemas.microsoft.com/office/drawing/2014/main" id="{E615DF18-63D4-457F-8B9B-E4DE58C5BBBC}"/>
+                <a16:creationId xmlns:a16="http://schemas.microsoft.com/office/drawing/2014/main" id="{C92D2979-FEB0-4DED-B426-00117BEEB2B3}"/>
               </a:ext>
             </a:extLst>
           </p:cNvPr>
@@ -9312,7 +9320,7 @@
           <p:cNvPr id="5" name="">
             <a:extLst xmlns:a="http://schemas.openxmlformats.org/drawingml/2006/main">
               <a:ext uri="{FF2B5EF4-FFF2-40B4-BE49-F238E27FC236}">
-                <a16:creationId xmlns:a16="http://schemas.microsoft.com/office/drawing/2014/main" id="{98603181-B577-41B1-B183-A48FAD35724D}"/>
+                <a16:creationId xmlns:a16="http://schemas.microsoft.com/office/drawing/2014/main" id="{868ACD5F-4E0C-4B4D-A54E-403816CB2E6C}"/>
               </a:ext>
             </a:extLst>
           </p:cNvPr>
@@ -9369,7 +9377,7 @@
           <p:cNvPr id="6" name="">
             <a:extLst xmlns:a="http://schemas.openxmlformats.org/drawingml/2006/main">
               <a:ext uri="{FF2B5EF4-FFF2-40B4-BE49-F238E27FC236}">
-                <a16:creationId xmlns:a16="http://schemas.microsoft.com/office/drawing/2014/main" id="{8ECA537B-3BF1-4C4C-94E9-3B8C316F304F}"/>
+                <a16:creationId xmlns:a16="http://schemas.microsoft.com/office/drawing/2014/main" id="{115B7380-FA43-4B8D-8FFE-6A37CB513C49}"/>
               </a:ext>
             </a:extLst>
           </p:cNvPr>
@@ -9426,7 +9434,7 @@
           <p:cNvPr id="7" name="">
             <a:extLst xmlns:a="http://schemas.openxmlformats.org/drawingml/2006/main">
               <a:ext uri="{FF2B5EF4-FFF2-40B4-BE49-F238E27FC236}">
-                <a16:creationId xmlns:a16="http://schemas.microsoft.com/office/drawing/2014/main" id="{A94609C2-98D7-427B-861E-0FE59A4F7E54}"/>
+                <a16:creationId xmlns:a16="http://schemas.microsoft.com/office/drawing/2014/main" id="{922F597F-6F9B-42A3-AB8D-8C386F87CC8C}"/>
               </a:ext>
             </a:extLst>
           </p:cNvPr>
@@ -9458,7 +9466,7 @@
           <p:cNvPr id="8" name="">
             <a:extLst xmlns:a="http://schemas.openxmlformats.org/drawingml/2006/main">
               <a:ext uri="{FF2B5EF4-FFF2-40B4-BE49-F238E27FC236}">
-                <a16:creationId xmlns:a16="http://schemas.microsoft.com/office/drawing/2014/main" id="{EE58332C-14C4-408F-BF62-83A32FD6DE64}"/>
+                <a16:creationId xmlns:a16="http://schemas.microsoft.com/office/drawing/2014/main" id="{E1183059-B786-4B00-8A75-12672D72A5F3}"/>
               </a:ext>
             </a:extLst>
           </p:cNvPr>
@@ -9515,7 +9523,7 @@
           <p:cNvPr id="9" name="">
             <a:extLst xmlns:a="http://schemas.openxmlformats.org/drawingml/2006/main">
               <a:ext uri="{FF2B5EF4-FFF2-40B4-BE49-F238E27FC236}">
-                <a16:creationId xmlns:a16="http://schemas.microsoft.com/office/drawing/2014/main" id="{2DF2317D-0F34-4B11-A275-4D64D99A22CD}"/>
+                <a16:creationId xmlns:a16="http://schemas.microsoft.com/office/drawing/2014/main" id="{44979202-7EAA-4A5D-BE08-23A41F9F65A0}"/>
               </a:ext>
             </a:extLst>
           </p:cNvPr>
@@ -9572,7 +9580,7 @@
           <p:cNvPr id="10" name="">
             <a:extLst xmlns:a="http://schemas.openxmlformats.org/drawingml/2006/main">
               <a:ext uri="{FF2B5EF4-FFF2-40B4-BE49-F238E27FC236}">
-                <a16:creationId xmlns:a16="http://schemas.microsoft.com/office/drawing/2014/main" id="{7A8CCF2A-095D-41BB-BCA2-EF7767A8E830}"/>
+                <a16:creationId xmlns:a16="http://schemas.microsoft.com/office/drawing/2014/main" id="{4E3092E1-244A-489F-8167-5288BC9DE1A2}"/>
               </a:ext>
             </a:extLst>
           </p:cNvPr>
@@ -9629,7 +9637,7 @@
           <p:cNvPr id="11" name="">
             <a:extLst xmlns:a="http://schemas.openxmlformats.org/drawingml/2006/main">
               <a:ext uri="{FF2B5EF4-FFF2-40B4-BE49-F238E27FC236}">
-                <a16:creationId xmlns:a16="http://schemas.microsoft.com/office/drawing/2014/main" id="{14F1BD14-55E1-4AA9-A1F6-0934D8981504}"/>
+                <a16:creationId xmlns:a16="http://schemas.microsoft.com/office/drawing/2014/main" id="{56C2D983-185B-481F-95E7-A83BD583ACA6}"/>
               </a:ext>
             </a:extLst>
           </p:cNvPr>
@@ -9686,7 +9694,7 @@
           <p:cNvPr id="12" name="">
             <a:extLst xmlns:a="http://schemas.openxmlformats.org/drawingml/2006/main">
               <a:ext uri="{FF2B5EF4-FFF2-40B4-BE49-F238E27FC236}">
-                <a16:creationId xmlns:a16="http://schemas.microsoft.com/office/drawing/2014/main" id="{DAD416F9-0535-49F6-A020-959BAB84F830}"/>
+                <a16:creationId xmlns:a16="http://schemas.microsoft.com/office/drawing/2014/main" id="{4C5359CE-A00B-45EB-9970-FC5DA0A67C08}"/>
               </a:ext>
             </a:extLst>
           </p:cNvPr>
@@ -9718,7 +9726,7 @@
           <p:cNvPr id="13" name="">
             <a:extLst xmlns:a="http://schemas.openxmlformats.org/drawingml/2006/main">
               <a:ext uri="{FF2B5EF4-FFF2-40B4-BE49-F238E27FC236}">
-                <a16:creationId xmlns:a16="http://schemas.microsoft.com/office/drawing/2014/main" id="{9C7E1BA4-7439-45C4-90E5-D3F99943B30C}"/>
+                <a16:creationId xmlns:a16="http://schemas.microsoft.com/office/drawing/2014/main" id="{FFB157AF-B50F-4FF5-8CF8-823B1D5586E7}"/>
               </a:ext>
             </a:extLst>
           </p:cNvPr>
@@ -9775,7 +9783,7 @@
           <p:cNvPr id="14" name="">
             <a:extLst xmlns:a="http://schemas.openxmlformats.org/drawingml/2006/main">
               <a:ext uri="{FF2B5EF4-FFF2-40B4-BE49-F238E27FC236}">
-                <a16:creationId xmlns:a16="http://schemas.microsoft.com/office/drawing/2014/main" id="{30F1075A-7066-451C-96CE-79BA58EECC15}"/>
+                <a16:creationId xmlns:a16="http://schemas.microsoft.com/office/drawing/2014/main" id="{07F50B18-44CE-4BDF-A1EB-836AD1713EF2}"/>
               </a:ext>
             </a:extLst>
           </p:cNvPr>
@@ -9830,7 +9838,7 @@
     </p:spTree>
     <p:extLst>
       <p:ext uri="{BB962C8B-B14F-4D97-AF65-F5344CB8AC3E}">
-        <p14:creationId xmlns:p14="http://schemas.microsoft.com/office/powerpoint/2010/main" val="1227482971"/>
+        <p14:creationId xmlns:p14="http://schemas.microsoft.com/office/powerpoint/2010/main" val="1856115893"/>
       </p:ext>
     </p:extLst>
   </p:cSld>
@@ -10031,7 +10039,7 @@
           <p:cNvPr id="16" name="">
             <a:extLst xmlns:a="http://schemas.openxmlformats.org/drawingml/2006/main">
               <a:ext uri="{FF2B5EF4-FFF2-40B4-BE49-F238E27FC236}">
-                <a16:creationId xmlns:a16="http://schemas.microsoft.com/office/drawing/2014/main" id="{867ADBE8-04B0-4845-A61D-E93102A9A504}"/>
+                <a16:creationId xmlns:a16="http://schemas.microsoft.com/office/drawing/2014/main" id="{E70B241D-A84B-4BE1-B758-283C8EFF3004}"/>
               </a:ext>
             </a:extLst>
           </p:cNvPr>
@@ -10063,7 +10071,7 @@
           <p:cNvPr id="2" name="">
             <a:extLst xmlns:a="http://schemas.openxmlformats.org/drawingml/2006/main">
               <a:ext uri="{FF2B5EF4-FFF2-40B4-BE49-F238E27FC236}">
-                <a16:creationId xmlns:a16="http://schemas.microsoft.com/office/drawing/2014/main" id="{F35C6420-2D64-4A85-B732-E61AE55E0464}"/>
+                <a16:creationId xmlns:a16="http://schemas.microsoft.com/office/drawing/2014/main" id="{AF6A5BC6-D90B-4C8A-83D1-1501B010B872}"/>
               </a:ext>
             </a:extLst>
           </p:cNvPr>
@@ -10120,7 +10128,7 @@
           <p:cNvPr id="3" name="">
             <a:extLst xmlns:a="http://schemas.openxmlformats.org/drawingml/2006/main">
               <a:ext uri="{FF2B5EF4-FFF2-40B4-BE49-F238E27FC236}">
-                <a16:creationId xmlns:a16="http://schemas.microsoft.com/office/drawing/2014/main" id="{7EEADE5D-FC3C-4F69-A5CA-A59E7D009E9E}"/>
+                <a16:creationId xmlns:a16="http://schemas.microsoft.com/office/drawing/2014/main" id="{A1911050-B756-4381-A627-ABF511E48E89}"/>
               </a:ext>
             </a:extLst>
           </p:cNvPr>
@@ -10152,7 +10160,7 @@
           <p:cNvPr id="4" name="">
             <a:extLst xmlns:a="http://schemas.openxmlformats.org/drawingml/2006/main">
               <a:ext uri="{FF2B5EF4-FFF2-40B4-BE49-F238E27FC236}">
-                <a16:creationId xmlns:a16="http://schemas.microsoft.com/office/drawing/2014/main" id="{B472AB40-5E57-4952-9CB6-71EF6309B5CD}"/>
+                <a16:creationId xmlns:a16="http://schemas.microsoft.com/office/drawing/2014/main" id="{35676860-0E11-4480-9FFF-22D5E70B69DB}"/>
               </a:ext>
             </a:extLst>
           </p:cNvPr>
@@ -10209,7 +10217,7 @@
           <p:cNvPr id="5" name="">
             <a:extLst xmlns:a="http://schemas.openxmlformats.org/drawingml/2006/main">
               <a:ext uri="{FF2B5EF4-FFF2-40B4-BE49-F238E27FC236}">
-                <a16:creationId xmlns:a16="http://schemas.microsoft.com/office/drawing/2014/main" id="{DE0A0B3E-A77A-4887-953D-527C844097BD}"/>
+                <a16:creationId xmlns:a16="http://schemas.microsoft.com/office/drawing/2014/main" id="{A6430160-BC85-4A82-9170-B3F26156D761}"/>
               </a:ext>
             </a:extLst>
           </p:cNvPr>
@@ -10266,7 +10274,7 @@
           <p:cNvPr id="6" name="">
             <a:extLst xmlns:a="http://schemas.openxmlformats.org/drawingml/2006/main">
               <a:ext uri="{FF2B5EF4-FFF2-40B4-BE49-F238E27FC236}">
-                <a16:creationId xmlns:a16="http://schemas.microsoft.com/office/drawing/2014/main" id="{508EEFF5-0DB9-4AD2-946C-263593195AE9}"/>
+                <a16:creationId xmlns:a16="http://schemas.microsoft.com/office/drawing/2014/main" id="{0610EA0B-88A9-40CB-B22F-6D6FCEF67AF2}"/>
               </a:ext>
             </a:extLst>
           </p:cNvPr>
@@ -10323,7 +10331,7 @@
           <p:cNvPr id="7" name="">
             <a:extLst xmlns:a="http://schemas.openxmlformats.org/drawingml/2006/main">
               <a:ext uri="{FF2B5EF4-FFF2-40B4-BE49-F238E27FC236}">
-                <a16:creationId xmlns:a16="http://schemas.microsoft.com/office/drawing/2014/main" id="{0ACED087-502F-4382-9339-3330B0B5B3DA}"/>
+                <a16:creationId xmlns:a16="http://schemas.microsoft.com/office/drawing/2014/main" id="{D570C782-30B3-49C8-A9C3-37D889B95B94}"/>
               </a:ext>
             </a:extLst>
           </p:cNvPr>
@@ -10355,7 +10363,7 @@
           <p:cNvPr id="8" name="">
             <a:extLst xmlns:a="http://schemas.openxmlformats.org/drawingml/2006/main">
               <a:ext uri="{FF2B5EF4-FFF2-40B4-BE49-F238E27FC236}">
-                <a16:creationId xmlns:a16="http://schemas.microsoft.com/office/drawing/2014/main" id="{0C34C194-98A0-4727-B586-3794AE282257}"/>
+                <a16:creationId xmlns:a16="http://schemas.microsoft.com/office/drawing/2014/main" id="{C72A24E9-D28E-412C-A0FD-5D40EB4022A0}"/>
               </a:ext>
             </a:extLst>
           </p:cNvPr>
@@ -10412,7 +10420,7 @@
           <p:cNvPr id="9" name="">
             <a:extLst xmlns:a="http://schemas.openxmlformats.org/drawingml/2006/main">
               <a:ext uri="{FF2B5EF4-FFF2-40B4-BE49-F238E27FC236}">
-                <a16:creationId xmlns:a16="http://schemas.microsoft.com/office/drawing/2014/main" id="{826E5FDF-8DB0-4EDE-87EC-9DABC9F9EF48}"/>
+                <a16:creationId xmlns:a16="http://schemas.microsoft.com/office/drawing/2014/main" id="{044033F1-B410-4B32-8D0F-B47C1CF5CFC7}"/>
               </a:ext>
             </a:extLst>
           </p:cNvPr>
@@ -10469,7 +10477,7 @@
           <p:cNvPr id="10" name="">
             <a:extLst xmlns:a="http://schemas.openxmlformats.org/drawingml/2006/main">
               <a:ext uri="{FF2B5EF4-FFF2-40B4-BE49-F238E27FC236}">
-                <a16:creationId xmlns:a16="http://schemas.microsoft.com/office/drawing/2014/main" id="{AB90D86A-B695-4AC7-9C08-537047897EBA}"/>
+                <a16:creationId xmlns:a16="http://schemas.microsoft.com/office/drawing/2014/main" id="{DA69149A-2022-49E3-8A59-1E98ADA269D7}"/>
               </a:ext>
             </a:extLst>
           </p:cNvPr>
@@ -10526,7 +10534,7 @@
           <p:cNvPr id="11" name="">
             <a:extLst xmlns:a="http://schemas.openxmlformats.org/drawingml/2006/main">
               <a:ext uri="{FF2B5EF4-FFF2-40B4-BE49-F238E27FC236}">
-                <a16:creationId xmlns:a16="http://schemas.microsoft.com/office/drawing/2014/main" id="{F09BD411-9046-4C69-B13F-C7598C1C8EAD}"/>
+                <a16:creationId xmlns:a16="http://schemas.microsoft.com/office/drawing/2014/main" id="{57C79EA9-2B6C-4E35-8B1D-0366DA70A275}"/>
               </a:ext>
             </a:extLst>
           </p:cNvPr>
@@ -10583,7 +10591,7 @@
           <p:cNvPr id="12" name="">
             <a:extLst xmlns:a="http://schemas.openxmlformats.org/drawingml/2006/main">
               <a:ext uri="{FF2B5EF4-FFF2-40B4-BE49-F238E27FC236}">
-                <a16:creationId xmlns:a16="http://schemas.microsoft.com/office/drawing/2014/main" id="{EAAD0D3D-73A9-4DF6-B304-48EFABE3B7D5}"/>
+                <a16:creationId xmlns:a16="http://schemas.microsoft.com/office/drawing/2014/main" id="{3B2F1AA4-F70B-4930-BAE9-A4D9317ECEA2}"/>
               </a:ext>
             </a:extLst>
           </p:cNvPr>
@@ -10640,7 +10648,7 @@
           <p:cNvPr id="13" name="">
             <a:extLst xmlns:a="http://schemas.openxmlformats.org/drawingml/2006/main">
               <a:ext uri="{FF2B5EF4-FFF2-40B4-BE49-F238E27FC236}">
-                <a16:creationId xmlns:a16="http://schemas.microsoft.com/office/drawing/2014/main" id="{619FE5E0-DD86-4F67-8629-8F52219A41DB}"/>
+                <a16:creationId xmlns:a16="http://schemas.microsoft.com/office/drawing/2014/main" id="{534D2021-9CCF-4BC9-8058-84CD7AB68172}"/>
               </a:ext>
             </a:extLst>
           </p:cNvPr>
@@ -10697,7 +10705,7 @@
           <p:cNvPr id="14" name="">
             <a:extLst xmlns:a="http://schemas.openxmlformats.org/drawingml/2006/main">
               <a:ext uri="{FF2B5EF4-FFF2-40B4-BE49-F238E27FC236}">
-                <a16:creationId xmlns:a16="http://schemas.microsoft.com/office/drawing/2014/main" id="{A204E3FF-47EC-4E10-8A43-9552E4B7B118}"/>
+                <a16:creationId xmlns:a16="http://schemas.microsoft.com/office/drawing/2014/main" id="{5565C055-F116-4498-B04B-3FEBFAE38091}"/>
               </a:ext>
             </a:extLst>
           </p:cNvPr>
@@ -10754,7 +10762,7 @@
           <p:cNvPr id="15" name="">
             <a:extLst xmlns:a="http://schemas.openxmlformats.org/drawingml/2006/main">
               <a:ext uri="{FF2B5EF4-FFF2-40B4-BE49-F238E27FC236}">
-                <a16:creationId xmlns:a16="http://schemas.microsoft.com/office/drawing/2014/main" id="{D8177318-9BCA-4B19-A3F0-A02D2E7C8896}"/>
+                <a16:creationId xmlns:a16="http://schemas.microsoft.com/office/drawing/2014/main" id="{B89AF9C0-CD7B-4976-983B-1871925A2843}"/>
               </a:ext>
             </a:extLst>
           </p:cNvPr>
@@ -10809,7 +10817,7 @@
     </p:spTree>
     <p:extLst>
       <p:ext uri="{BB962C8B-B14F-4D97-AF65-F5344CB8AC3E}">
-        <p14:creationId xmlns:p14="http://schemas.microsoft.com/office/powerpoint/2010/main" val="641918058"/>
+        <p14:creationId xmlns:p14="http://schemas.microsoft.com/office/powerpoint/2010/main" val="349020282"/>
       </p:ext>
     </p:extLst>
   </p:cSld>
@@ -10964,7 +10972,7 @@
           <p:cNvPr id="16" name="">
             <a:extLst xmlns:a="http://schemas.openxmlformats.org/drawingml/2006/main">
               <a:ext uri="{FF2B5EF4-FFF2-40B4-BE49-F238E27FC236}">
-                <a16:creationId xmlns:a16="http://schemas.microsoft.com/office/drawing/2014/main" id="{4EBD99D3-8083-4388-BF64-50E30F25C779}"/>
+                <a16:creationId xmlns:a16="http://schemas.microsoft.com/office/drawing/2014/main" id="{2D2102C6-E16D-4DFD-8044-29A558F2124E}"/>
               </a:ext>
             </a:extLst>
           </p:cNvPr>
@@ -10996,7 +11004,7 @@
           <p:cNvPr id="2" name="">
             <a:extLst xmlns:a="http://schemas.openxmlformats.org/drawingml/2006/main">
               <a:ext uri="{FF2B5EF4-FFF2-40B4-BE49-F238E27FC236}">
-                <a16:creationId xmlns:a16="http://schemas.microsoft.com/office/drawing/2014/main" id="{EE0C5987-6AFB-47C9-BF66-156781409787}"/>
+                <a16:creationId xmlns:a16="http://schemas.microsoft.com/office/drawing/2014/main" id="{B69B7BDC-4AB2-4407-94E1-4A85D11A4235}"/>
               </a:ext>
             </a:extLst>
           </p:cNvPr>
@@ -11053,7 +11061,7 @@
           <p:cNvPr id="3" name="">
             <a:extLst xmlns:a="http://schemas.openxmlformats.org/drawingml/2006/main">
               <a:ext uri="{FF2B5EF4-FFF2-40B4-BE49-F238E27FC236}">
-                <a16:creationId xmlns:a16="http://schemas.microsoft.com/office/drawing/2014/main" id="{3F3EB2AB-10C5-41D4-AA40-192370C64C8E}"/>
+                <a16:creationId xmlns:a16="http://schemas.microsoft.com/office/drawing/2014/main" id="{0B1942F8-6A4B-406A-956A-CECE1AD77F94}"/>
               </a:ext>
             </a:extLst>
           </p:cNvPr>
@@ -11085,7 +11093,7 @@
           <p:cNvPr id="4" name="">
             <a:extLst xmlns:a="http://schemas.openxmlformats.org/drawingml/2006/main">
               <a:ext uri="{FF2B5EF4-FFF2-40B4-BE49-F238E27FC236}">
-                <a16:creationId xmlns:a16="http://schemas.microsoft.com/office/drawing/2014/main" id="{71F99B1A-87A4-483A-97C8-5BE4C9154EE4}"/>
+                <a16:creationId xmlns:a16="http://schemas.microsoft.com/office/drawing/2014/main" id="{5AC15417-334A-4EE6-8820-C2BBA9453206}"/>
               </a:ext>
             </a:extLst>
           </p:cNvPr>
@@ -11142,7 +11150,7 @@
           <p:cNvPr id="5" name="">
             <a:extLst xmlns:a="http://schemas.openxmlformats.org/drawingml/2006/main">
               <a:ext uri="{FF2B5EF4-FFF2-40B4-BE49-F238E27FC236}">
-                <a16:creationId xmlns:a16="http://schemas.microsoft.com/office/drawing/2014/main" id="{C3BA5C6B-BEBB-40DC-94F7-8E82CC8B1DA0}"/>
+                <a16:creationId xmlns:a16="http://schemas.microsoft.com/office/drawing/2014/main" id="{18144FE5-ECEC-4570-AE97-E4281CE532E2}"/>
               </a:ext>
             </a:extLst>
           </p:cNvPr>
@@ -11199,7 +11207,7 @@
           <p:cNvPr id="6" name="">
             <a:extLst xmlns:a="http://schemas.openxmlformats.org/drawingml/2006/main">
               <a:ext uri="{FF2B5EF4-FFF2-40B4-BE49-F238E27FC236}">
-                <a16:creationId xmlns:a16="http://schemas.microsoft.com/office/drawing/2014/main" id="{D64A2D64-B1AF-4A4B-8FC3-4AC900DEE243}"/>
+                <a16:creationId xmlns:a16="http://schemas.microsoft.com/office/drawing/2014/main" id="{8E3147AA-5DCB-4C8A-BA49-E4DF9C614C67}"/>
               </a:ext>
             </a:extLst>
           </p:cNvPr>
@@ -11256,7 +11264,7 @@
           <p:cNvPr id="7" name="">
             <a:extLst xmlns:a="http://schemas.openxmlformats.org/drawingml/2006/main">
               <a:ext uri="{FF2B5EF4-FFF2-40B4-BE49-F238E27FC236}">
-                <a16:creationId xmlns:a16="http://schemas.microsoft.com/office/drawing/2014/main" id="{81721506-80EF-4E91-A5C1-F1D6FB28DE54}"/>
+                <a16:creationId xmlns:a16="http://schemas.microsoft.com/office/drawing/2014/main" id="{3B5D69BA-85E6-4D6C-AC61-1B5440153353}"/>
               </a:ext>
             </a:extLst>
           </p:cNvPr>
@@ -11288,7 +11296,7 @@
           <p:cNvPr id="8" name="">
             <a:extLst xmlns:a="http://schemas.openxmlformats.org/drawingml/2006/main">
               <a:ext uri="{FF2B5EF4-FFF2-40B4-BE49-F238E27FC236}">
-                <a16:creationId xmlns:a16="http://schemas.microsoft.com/office/drawing/2014/main" id="{9B3759E7-122C-45E7-9F80-9B3554BBABE3}"/>
+                <a16:creationId xmlns:a16="http://schemas.microsoft.com/office/drawing/2014/main" id="{1C3151CC-47C2-4032-A6AD-13930F37796E}"/>
               </a:ext>
             </a:extLst>
           </p:cNvPr>
@@ -11345,7 +11353,7 @@
           <p:cNvPr id="9" name="">
             <a:extLst xmlns:a="http://schemas.openxmlformats.org/drawingml/2006/main">
               <a:ext uri="{FF2B5EF4-FFF2-40B4-BE49-F238E27FC236}">
-                <a16:creationId xmlns:a16="http://schemas.microsoft.com/office/drawing/2014/main" id="{3DACE9DF-9F2A-40A0-963D-DDF3FD368F0C}"/>
+                <a16:creationId xmlns:a16="http://schemas.microsoft.com/office/drawing/2014/main" id="{9AD13A36-765B-4B06-A2A4-D932D71276C7}"/>
               </a:ext>
             </a:extLst>
           </p:cNvPr>
@@ -11406,7 +11414,7 @@
           <p:nvPr/>
         </p:nvPicPr>
         <p:blipFill>
-          <a:blip xmlns:r="http://schemas.openxmlformats.org/officeDocument/2006/relationships" xmlns:a="http://schemas.openxmlformats.org/drawingml/2006/main" r:embed="Rd5555948f6e2448c"/>
+          <a:blip xmlns:r="http://schemas.openxmlformats.org/officeDocument/2006/relationships" xmlns:a="http://schemas.openxmlformats.org/drawingml/2006/main" r:embed="R5399250bae674626"/>
           <a:stretch xmlns:a="http://schemas.openxmlformats.org/drawingml/2006/main"/>
         </p:blipFill>
         <p:spPr>
@@ -11424,7 +11432,7 @@
           <p:cNvPr id="11" name="">
             <a:extLst xmlns:a="http://schemas.openxmlformats.org/drawingml/2006/main">
               <a:ext uri="{FF2B5EF4-FFF2-40B4-BE49-F238E27FC236}">
-                <a16:creationId xmlns:a16="http://schemas.microsoft.com/office/drawing/2014/main" id="{6E17AF3A-AF24-433B-83AF-14F309B12A83}"/>
+                <a16:creationId xmlns:a16="http://schemas.microsoft.com/office/drawing/2014/main" id="{1AC03A42-E19D-42C5-A1A2-26488D74B85C}"/>
               </a:ext>
             </a:extLst>
           </p:cNvPr>
@@ -11481,7 +11489,7 @@
           <p:cNvPr id="12" name="">
             <a:extLst xmlns:a="http://schemas.openxmlformats.org/drawingml/2006/main">
               <a:ext uri="{FF2B5EF4-FFF2-40B4-BE49-F238E27FC236}">
-                <a16:creationId xmlns:a16="http://schemas.microsoft.com/office/drawing/2014/main" id="{7129DEEC-8395-4043-B6C9-BF35305AA9C3}"/>
+                <a16:creationId xmlns:a16="http://schemas.microsoft.com/office/drawing/2014/main" id="{9C0CF06A-06D6-44A0-8747-66BC613BE755}"/>
               </a:ext>
             </a:extLst>
           </p:cNvPr>
@@ -11538,7 +11546,7 @@
           <p:cNvPr id="13" name="">
             <a:extLst xmlns:a="http://schemas.openxmlformats.org/drawingml/2006/main">
               <a:ext uri="{FF2B5EF4-FFF2-40B4-BE49-F238E27FC236}">
-                <a16:creationId xmlns:a16="http://schemas.microsoft.com/office/drawing/2014/main" id="{23A76BAD-DD25-4EA5-AE58-48A7597FFC28}"/>
+                <a16:creationId xmlns:a16="http://schemas.microsoft.com/office/drawing/2014/main" id="{BAD4D33C-F867-4DEE-8802-54EE6EABA491}"/>
               </a:ext>
             </a:extLst>
           </p:cNvPr>
@@ -11570,7 +11578,7 @@
           <p:cNvPr id="14" name="">
             <a:extLst xmlns:a="http://schemas.openxmlformats.org/drawingml/2006/main">
               <a:ext uri="{FF2B5EF4-FFF2-40B4-BE49-F238E27FC236}">
-                <a16:creationId xmlns:a16="http://schemas.microsoft.com/office/drawing/2014/main" id="{EE3DD6A7-F198-417D-B81B-B5DEA68A6060}"/>
+                <a16:creationId xmlns:a16="http://schemas.microsoft.com/office/drawing/2014/main" id="{DF88A3E4-3D66-4AC1-8463-0227E3BA7A7E}"/>
               </a:ext>
             </a:extLst>
           </p:cNvPr>
@@ -11627,7 +11635,7 @@
           <p:cNvPr id="15" name="">
             <a:extLst xmlns:a="http://schemas.openxmlformats.org/drawingml/2006/main">
               <a:ext uri="{FF2B5EF4-FFF2-40B4-BE49-F238E27FC236}">
-                <a16:creationId xmlns:a16="http://schemas.microsoft.com/office/drawing/2014/main" id="{736FFC58-FC55-4FFA-B4F2-25412988D486}"/>
+                <a16:creationId xmlns:a16="http://schemas.microsoft.com/office/drawing/2014/main" id="{5F20AC08-B79C-4204-B176-DE16EF7AA62B}"/>
               </a:ext>
             </a:extLst>
           </p:cNvPr>
@@ -11682,7 +11690,7 @@
     </p:spTree>
     <p:extLst>
       <p:ext uri="{BB962C8B-B14F-4D97-AF65-F5344CB8AC3E}">
-        <p14:creationId xmlns:p14="http://schemas.microsoft.com/office/powerpoint/2010/main" val="1595875680"/>
+        <p14:creationId xmlns:p14="http://schemas.microsoft.com/office/powerpoint/2010/main" val="719562400"/>
       </p:ext>
     </p:extLst>
   </p:cSld>
@@ -11837,7 +11845,7 @@
           <p:cNvPr id="23" name="">
             <a:extLst xmlns:a="http://schemas.openxmlformats.org/drawingml/2006/main">
               <a:ext uri="{FF2B5EF4-FFF2-40B4-BE49-F238E27FC236}">
-                <a16:creationId xmlns:a16="http://schemas.microsoft.com/office/drawing/2014/main" id="{3C0CCE75-E3F3-45A5-97A0-6717A06B8FB1}"/>
+                <a16:creationId xmlns:a16="http://schemas.microsoft.com/office/drawing/2014/main" id="{61AFDF52-6B8A-49B5-96A6-25D765C127F9}"/>
               </a:ext>
             </a:extLst>
           </p:cNvPr>
@@ -11869,7 +11877,7 @@
           <p:cNvPr id="2" name="">
             <a:extLst xmlns:a="http://schemas.openxmlformats.org/drawingml/2006/main">
               <a:ext uri="{FF2B5EF4-FFF2-40B4-BE49-F238E27FC236}">
-                <a16:creationId xmlns:a16="http://schemas.microsoft.com/office/drawing/2014/main" id="{E09330FB-EACF-4CD7-B9E7-3A8CB0454794}"/>
+                <a16:creationId xmlns:a16="http://schemas.microsoft.com/office/drawing/2014/main" id="{1EE303F4-8F53-424D-B023-B48511DC06A6}"/>
               </a:ext>
             </a:extLst>
           </p:cNvPr>
@@ -11926,7 +11934,7 @@
           <p:cNvPr id="3" name="">
             <a:extLst xmlns:a="http://schemas.openxmlformats.org/drawingml/2006/main">
               <a:ext uri="{FF2B5EF4-FFF2-40B4-BE49-F238E27FC236}">
-                <a16:creationId xmlns:a16="http://schemas.microsoft.com/office/drawing/2014/main" id="{4EE2E46A-E5AB-491A-986D-F4D6629C410E}"/>
+                <a16:creationId xmlns:a16="http://schemas.microsoft.com/office/drawing/2014/main" id="{89A8F530-0045-48C5-97C4-945D6A17FB37}"/>
               </a:ext>
             </a:extLst>
           </p:cNvPr>
@@ -11958,7 +11966,7 @@
           <p:cNvPr id="4" name="">
             <a:extLst xmlns:a="http://schemas.openxmlformats.org/drawingml/2006/main">
               <a:ext uri="{FF2B5EF4-FFF2-40B4-BE49-F238E27FC236}">
-                <a16:creationId xmlns:a16="http://schemas.microsoft.com/office/drawing/2014/main" id="{04850323-57F9-4B82-8923-08256E462CE1}"/>
+                <a16:creationId xmlns:a16="http://schemas.microsoft.com/office/drawing/2014/main" id="{27250714-680A-410C-8D82-1E6C3A8AD264}"/>
               </a:ext>
             </a:extLst>
           </p:cNvPr>
@@ -12015,7 +12023,7 @@
           <p:cNvPr id="5" name="">
             <a:extLst xmlns:a="http://schemas.openxmlformats.org/drawingml/2006/main">
               <a:ext uri="{FF2B5EF4-FFF2-40B4-BE49-F238E27FC236}">
-                <a16:creationId xmlns:a16="http://schemas.microsoft.com/office/drawing/2014/main" id="{30515B11-934C-4A64-8F9B-A755EEA43CA7}"/>
+                <a16:creationId xmlns:a16="http://schemas.microsoft.com/office/drawing/2014/main" id="{666496A2-D573-45D6-8434-08A0E915DA41}"/>
               </a:ext>
             </a:extLst>
           </p:cNvPr>
@@ -12072,7 +12080,7 @@
           <p:cNvPr id="6" name="">
             <a:extLst xmlns:a="http://schemas.openxmlformats.org/drawingml/2006/main">
               <a:ext uri="{FF2B5EF4-FFF2-40B4-BE49-F238E27FC236}">
-                <a16:creationId xmlns:a16="http://schemas.microsoft.com/office/drawing/2014/main" id="{5D2B6324-47BE-4190-BB71-4B4FC73276DA}"/>
+                <a16:creationId xmlns:a16="http://schemas.microsoft.com/office/drawing/2014/main" id="{CA573EE8-5B95-4BF2-816F-2C4BD0341150}"/>
               </a:ext>
             </a:extLst>
           </p:cNvPr>
@@ -12129,7 +12137,7 @@
           <p:cNvPr id="7" name="">
             <a:extLst xmlns:a="http://schemas.openxmlformats.org/drawingml/2006/main">
               <a:ext uri="{FF2B5EF4-FFF2-40B4-BE49-F238E27FC236}">
-                <a16:creationId xmlns:a16="http://schemas.microsoft.com/office/drawing/2014/main" id="{1FD7E9EF-66A4-4129-A0C4-A3CCD760EB07}"/>
+                <a16:creationId xmlns:a16="http://schemas.microsoft.com/office/drawing/2014/main" id="{C03976DD-699E-44E1-9F64-E670D89F71AD}"/>
               </a:ext>
             </a:extLst>
           </p:cNvPr>
@@ -12161,7 +12169,7 @@
           <p:cNvPr id="8" name="">
             <a:extLst xmlns:a="http://schemas.openxmlformats.org/drawingml/2006/main">
               <a:ext uri="{FF2B5EF4-FFF2-40B4-BE49-F238E27FC236}">
-                <a16:creationId xmlns:a16="http://schemas.microsoft.com/office/drawing/2014/main" id="{AD9F0736-2AA3-4208-BBFF-C5C4A426AE35}"/>
+                <a16:creationId xmlns:a16="http://schemas.microsoft.com/office/drawing/2014/main" id="{FB53F563-5070-42F5-AD62-57EE21C8D3AA}"/>
               </a:ext>
             </a:extLst>
           </p:cNvPr>
@@ -12218,7 +12226,7 @@
           <p:cNvPr id="9" name="">
             <a:extLst xmlns:a="http://schemas.openxmlformats.org/drawingml/2006/main">
               <a:ext uri="{FF2B5EF4-FFF2-40B4-BE49-F238E27FC236}">
-                <a16:creationId xmlns:a16="http://schemas.microsoft.com/office/drawing/2014/main" id="{6FE4E231-28A5-46E8-8398-E7A131AF88DA}"/>
+                <a16:creationId xmlns:a16="http://schemas.microsoft.com/office/drawing/2014/main" id="{FCB9E2E3-14CA-4FDD-BB0E-460D65C179E2}"/>
               </a:ext>
             </a:extLst>
           </p:cNvPr>
@@ -12275,7 +12283,7 @@
           <p:cNvPr id="10" name="">
             <a:extLst xmlns:a="http://schemas.openxmlformats.org/drawingml/2006/main">
               <a:ext uri="{FF2B5EF4-FFF2-40B4-BE49-F238E27FC236}">
-                <a16:creationId xmlns:a16="http://schemas.microsoft.com/office/drawing/2014/main" id="{E8A5227A-C413-4D70-9C5F-1A322914B50E}"/>
+                <a16:creationId xmlns:a16="http://schemas.microsoft.com/office/drawing/2014/main" id="{0861C1CB-A0AA-4EA5-B35D-28A7F465D07E}"/>
               </a:ext>
             </a:extLst>
           </p:cNvPr>
@@ -12309,7 +12317,7 @@
           <p:cNvPr id="11" name="">
             <a:extLst xmlns:a="http://schemas.openxmlformats.org/drawingml/2006/main">
               <a:ext uri="{FF2B5EF4-FFF2-40B4-BE49-F238E27FC236}">
-                <a16:creationId xmlns:a16="http://schemas.microsoft.com/office/drawing/2014/main" id="{E273BAB3-0263-4834-91DE-870DAF1F794E}"/>
+                <a16:creationId xmlns:a16="http://schemas.microsoft.com/office/drawing/2014/main" id="{815A57A3-A61B-4199-AA5F-6CF63BB40119}"/>
               </a:ext>
             </a:extLst>
           </p:cNvPr>
@@ -12341,7 +12349,7 @@
           <p:cNvPr id="12" name="">
             <a:extLst xmlns:a="http://schemas.openxmlformats.org/drawingml/2006/main">
               <a:ext uri="{FF2B5EF4-FFF2-40B4-BE49-F238E27FC236}">
-                <a16:creationId xmlns:a16="http://schemas.microsoft.com/office/drawing/2014/main" id="{FD6AE372-10DB-4CCE-BF7E-9D753F75E15A}"/>
+                <a16:creationId xmlns:a16="http://schemas.microsoft.com/office/drawing/2014/main" id="{34045CC1-2056-4A57-8D29-F8C0CBCAB4D7}"/>
               </a:ext>
             </a:extLst>
           </p:cNvPr>
@@ -12398,7 +12406,7 @@
           <p:cNvPr id="13" name="">
             <a:extLst xmlns:a="http://schemas.openxmlformats.org/drawingml/2006/main">
               <a:ext uri="{FF2B5EF4-FFF2-40B4-BE49-F238E27FC236}">
-                <a16:creationId xmlns:a16="http://schemas.microsoft.com/office/drawing/2014/main" id="{409BD27A-F6D6-408E-B4A1-AA0AB2DB3947}"/>
+                <a16:creationId xmlns:a16="http://schemas.microsoft.com/office/drawing/2014/main" id="{C92F6CDE-8872-407D-BEEC-B814C727E7F0}"/>
               </a:ext>
             </a:extLst>
           </p:cNvPr>
@@ -12455,7 +12463,7 @@
           <p:cNvPr id="14" name="">
             <a:extLst xmlns:a="http://schemas.openxmlformats.org/drawingml/2006/main">
               <a:ext uri="{FF2B5EF4-FFF2-40B4-BE49-F238E27FC236}">
-                <a16:creationId xmlns:a16="http://schemas.microsoft.com/office/drawing/2014/main" id="{24873905-6359-4325-BA6A-63CDA7045DE1}"/>
+                <a16:creationId xmlns:a16="http://schemas.microsoft.com/office/drawing/2014/main" id="{6A0F66A2-2DC6-446B-81F4-7F735F4289F4}"/>
               </a:ext>
             </a:extLst>
           </p:cNvPr>
@@ -12489,7 +12497,7 @@
           <p:cNvPr id="15" name="">
             <a:extLst xmlns:a="http://schemas.openxmlformats.org/drawingml/2006/main">
               <a:ext uri="{FF2B5EF4-FFF2-40B4-BE49-F238E27FC236}">
-                <a16:creationId xmlns:a16="http://schemas.microsoft.com/office/drawing/2014/main" id="{F2FA00B6-AB97-4877-BD32-02C83E0783B8}"/>
+                <a16:creationId xmlns:a16="http://schemas.microsoft.com/office/drawing/2014/main" id="{85816847-DD27-4122-9BB9-AA70F8E21E6E}"/>
               </a:ext>
             </a:extLst>
           </p:cNvPr>
@@ -12521,7 +12529,7 @@
           <p:cNvPr id="16" name="">
             <a:extLst xmlns:a="http://schemas.openxmlformats.org/drawingml/2006/main">
               <a:ext uri="{FF2B5EF4-FFF2-40B4-BE49-F238E27FC236}">
-                <a16:creationId xmlns:a16="http://schemas.microsoft.com/office/drawing/2014/main" id="{B5A1AF6E-E61C-4B4A-88AD-97B492BC9630}"/>
+                <a16:creationId xmlns:a16="http://schemas.microsoft.com/office/drawing/2014/main" id="{80018D51-DD33-414C-B7D6-677C70F18813}"/>
               </a:ext>
             </a:extLst>
           </p:cNvPr>
@@ -12578,7 +12586,7 @@
           <p:cNvPr id="17" name="">
             <a:extLst xmlns:a="http://schemas.openxmlformats.org/drawingml/2006/main">
               <a:ext uri="{FF2B5EF4-FFF2-40B4-BE49-F238E27FC236}">
-                <a16:creationId xmlns:a16="http://schemas.microsoft.com/office/drawing/2014/main" id="{198B297F-CCFA-4377-8250-0814166FAFD8}"/>
+                <a16:creationId xmlns:a16="http://schemas.microsoft.com/office/drawing/2014/main" id="{A9A4C420-ADC2-4B27-B8B1-BAF37705221A}"/>
               </a:ext>
             </a:extLst>
           </p:cNvPr>
@@ -12635,7 +12643,7 @@
           <p:cNvPr id="18" name="">
             <a:extLst xmlns:a="http://schemas.openxmlformats.org/drawingml/2006/main">
               <a:ext uri="{FF2B5EF4-FFF2-40B4-BE49-F238E27FC236}">
-                <a16:creationId xmlns:a16="http://schemas.microsoft.com/office/drawing/2014/main" id="{BC1E9FC1-86B7-41CF-80F6-F34824F1D1F0}"/>
+                <a16:creationId xmlns:a16="http://schemas.microsoft.com/office/drawing/2014/main" id="{F4A5F27A-3C90-45CC-AEA0-AA6A9DD6C3F9}"/>
               </a:ext>
             </a:extLst>
           </p:cNvPr>
@@ -12669,7 +12677,7 @@
           <p:cNvPr id="19" name="">
             <a:extLst xmlns:a="http://schemas.openxmlformats.org/drawingml/2006/main">
               <a:ext uri="{FF2B5EF4-FFF2-40B4-BE49-F238E27FC236}">
-                <a16:creationId xmlns:a16="http://schemas.microsoft.com/office/drawing/2014/main" id="{BBF65AEC-83C0-440D-A689-8B2F30DBF225}"/>
+                <a16:creationId xmlns:a16="http://schemas.microsoft.com/office/drawing/2014/main" id="{1FD22B4E-2679-4963-B687-389F518B0C2F}"/>
               </a:ext>
             </a:extLst>
           </p:cNvPr>
@@ -12701,7 +12709,7 @@
           <p:cNvPr id="20" name="">
             <a:extLst xmlns:a="http://schemas.openxmlformats.org/drawingml/2006/main">
               <a:ext uri="{FF2B5EF4-FFF2-40B4-BE49-F238E27FC236}">
-                <a16:creationId xmlns:a16="http://schemas.microsoft.com/office/drawing/2014/main" id="{80115ECD-6623-4F90-B52A-33F94E47537F}"/>
+                <a16:creationId xmlns:a16="http://schemas.microsoft.com/office/drawing/2014/main" id="{D9E7A1D8-CD5D-4941-8E21-0635AF071BB5}"/>
               </a:ext>
             </a:extLst>
           </p:cNvPr>
@@ -12758,7 +12766,7 @@
           <p:cNvPr id="21" name="">
             <a:extLst xmlns:a="http://schemas.openxmlformats.org/drawingml/2006/main">
               <a:ext uri="{FF2B5EF4-FFF2-40B4-BE49-F238E27FC236}">
-                <a16:creationId xmlns:a16="http://schemas.microsoft.com/office/drawing/2014/main" id="{5E911D19-B6FF-4E4A-9030-FFFC30FCD8AA}"/>
+                <a16:creationId xmlns:a16="http://schemas.microsoft.com/office/drawing/2014/main" id="{F4058E94-48E1-4170-9C95-1F3EBC5CB9AD}"/>
               </a:ext>
             </a:extLst>
           </p:cNvPr>
@@ -12815,7 +12823,7 @@
           <p:cNvPr id="22" name="">
             <a:extLst xmlns:a="http://schemas.openxmlformats.org/drawingml/2006/main">
               <a:ext uri="{FF2B5EF4-FFF2-40B4-BE49-F238E27FC236}">
-                <a16:creationId xmlns:a16="http://schemas.microsoft.com/office/drawing/2014/main" id="{F52E63B6-AF69-4787-BEFC-C84D2D736462}"/>
+                <a16:creationId xmlns:a16="http://schemas.microsoft.com/office/drawing/2014/main" id="{E87C224F-6919-4FDC-BC87-107B2C82178D}"/>
               </a:ext>
             </a:extLst>
           </p:cNvPr>
@@ -12870,7 +12878,7 @@
     </p:spTree>
     <p:extLst>
       <p:ext uri="{BB962C8B-B14F-4D97-AF65-F5344CB8AC3E}">
-        <p14:creationId xmlns:p14="http://schemas.microsoft.com/office/powerpoint/2010/main" val="2034870527"/>
+        <p14:creationId xmlns:p14="http://schemas.microsoft.com/office/powerpoint/2010/main" val="2019978635"/>
       </p:ext>
     </p:extLst>
   </p:cSld>
@@ -13071,7 +13079,7 @@
           <p:cNvPr id="22" name="">
             <a:extLst xmlns:a="http://schemas.openxmlformats.org/drawingml/2006/main">
               <a:ext uri="{FF2B5EF4-FFF2-40B4-BE49-F238E27FC236}">
-                <a16:creationId xmlns:a16="http://schemas.microsoft.com/office/drawing/2014/main" id="{4215FC13-48F3-4D5D-86E8-25FE25F76EF1}"/>
+                <a16:creationId xmlns:a16="http://schemas.microsoft.com/office/drawing/2014/main" id="{CBEC96D1-8C9C-4CC8-9809-1E7698E21AE7}"/>
               </a:ext>
             </a:extLst>
           </p:cNvPr>
@@ -13103,7 +13111,7 @@
           <p:cNvPr id="2" name="">
             <a:extLst xmlns:a="http://schemas.openxmlformats.org/drawingml/2006/main">
               <a:ext uri="{FF2B5EF4-FFF2-40B4-BE49-F238E27FC236}">
-                <a16:creationId xmlns:a16="http://schemas.microsoft.com/office/drawing/2014/main" id="{E55049F6-E58E-47E9-80EF-B833477170CD}"/>
+                <a16:creationId xmlns:a16="http://schemas.microsoft.com/office/drawing/2014/main" id="{1C4EC87D-175B-41BF-BA6F-E355E8495CF4}"/>
               </a:ext>
             </a:extLst>
           </p:cNvPr>
@@ -13160,7 +13168,7 @@
           <p:cNvPr id="3" name="">
             <a:extLst xmlns:a="http://schemas.openxmlformats.org/drawingml/2006/main">
               <a:ext uri="{FF2B5EF4-FFF2-40B4-BE49-F238E27FC236}">
-                <a16:creationId xmlns:a16="http://schemas.microsoft.com/office/drawing/2014/main" id="{F7D6BCE9-AB72-4404-A579-6530EDE72A2C}"/>
+                <a16:creationId xmlns:a16="http://schemas.microsoft.com/office/drawing/2014/main" id="{020484C9-1EFA-4FD4-8F91-A506589C1C95}"/>
               </a:ext>
             </a:extLst>
           </p:cNvPr>
@@ -13192,7 +13200,7 @@
           <p:cNvPr id="4" name="">
             <a:extLst xmlns:a="http://schemas.openxmlformats.org/drawingml/2006/main">
               <a:ext uri="{FF2B5EF4-FFF2-40B4-BE49-F238E27FC236}">
-                <a16:creationId xmlns:a16="http://schemas.microsoft.com/office/drawing/2014/main" id="{17E42B2F-4C1C-41B0-909F-A44E4459A10C}"/>
+                <a16:creationId xmlns:a16="http://schemas.microsoft.com/office/drawing/2014/main" id="{94CCE741-ACE5-48F0-A32F-DF416F553187}"/>
               </a:ext>
             </a:extLst>
           </p:cNvPr>
@@ -13249,7 +13257,7 @@
           <p:cNvPr id="5" name="">
             <a:extLst xmlns:a="http://schemas.openxmlformats.org/drawingml/2006/main">
               <a:ext uri="{FF2B5EF4-FFF2-40B4-BE49-F238E27FC236}">
-                <a16:creationId xmlns:a16="http://schemas.microsoft.com/office/drawing/2014/main" id="{93D76EC9-A9CF-4EAA-A174-32B68D7DE403}"/>
+                <a16:creationId xmlns:a16="http://schemas.microsoft.com/office/drawing/2014/main" id="{2AEE9E4E-09F1-4562-9AB4-6BA2EA397F69}"/>
               </a:ext>
             </a:extLst>
           </p:cNvPr>
@@ -13306,7 +13314,7 @@
           <p:cNvPr id="6" name="">
             <a:extLst xmlns:a="http://schemas.openxmlformats.org/drawingml/2006/main">
               <a:ext uri="{FF2B5EF4-FFF2-40B4-BE49-F238E27FC236}">
-                <a16:creationId xmlns:a16="http://schemas.microsoft.com/office/drawing/2014/main" id="{F7CA20E4-0A30-4F49-A106-8672F21C34BF}"/>
+                <a16:creationId xmlns:a16="http://schemas.microsoft.com/office/drawing/2014/main" id="{851461DE-8E1E-4A47-9B6E-846E8DFA7BAD}"/>
               </a:ext>
             </a:extLst>
           </p:cNvPr>
@@ -13363,7 +13371,7 @@
           <p:cNvPr id="7" name="">
             <a:extLst xmlns:a="http://schemas.openxmlformats.org/drawingml/2006/main">
               <a:ext uri="{FF2B5EF4-FFF2-40B4-BE49-F238E27FC236}">
-                <a16:creationId xmlns:a16="http://schemas.microsoft.com/office/drawing/2014/main" id="{CCAACEB0-437D-4986-80E6-5BF852AE703E}"/>
+                <a16:creationId xmlns:a16="http://schemas.microsoft.com/office/drawing/2014/main" id="{827BE387-A887-4FA9-8CED-497038B05443}"/>
               </a:ext>
             </a:extLst>
           </p:cNvPr>
@@ -13395,7 +13403,7 @@
           <p:cNvPr id="8" name="">
             <a:extLst xmlns:a="http://schemas.openxmlformats.org/drawingml/2006/main">
               <a:ext uri="{FF2B5EF4-FFF2-40B4-BE49-F238E27FC236}">
-                <a16:creationId xmlns:a16="http://schemas.microsoft.com/office/drawing/2014/main" id="{1B48A97D-CF3B-42D6-BA3F-DA1A119CA13A}"/>
+                <a16:creationId xmlns:a16="http://schemas.microsoft.com/office/drawing/2014/main" id="{7AE44BB8-F5A5-4A62-8EF8-EE3134A41264}"/>
               </a:ext>
             </a:extLst>
           </p:cNvPr>
@@ -13452,7 +13460,7 @@
           <p:cNvPr id="9" name="">
             <a:extLst xmlns:a="http://schemas.openxmlformats.org/drawingml/2006/main">
               <a:ext uri="{FF2B5EF4-FFF2-40B4-BE49-F238E27FC236}">
-                <a16:creationId xmlns:a16="http://schemas.microsoft.com/office/drawing/2014/main" id="{F39A17D0-4A1F-4064-8317-84C861F3669C}"/>
+                <a16:creationId xmlns:a16="http://schemas.microsoft.com/office/drawing/2014/main" id="{AE3801DB-445B-4E9E-9C15-9DF2A734F6F7}"/>
               </a:ext>
             </a:extLst>
           </p:cNvPr>
@@ -13509,7 +13517,7 @@
           <p:cNvPr id="10" name="">
             <a:extLst xmlns:a="http://schemas.openxmlformats.org/drawingml/2006/main">
               <a:ext uri="{FF2B5EF4-FFF2-40B4-BE49-F238E27FC236}">
-                <a16:creationId xmlns:a16="http://schemas.microsoft.com/office/drawing/2014/main" id="{6841E28D-10DF-4334-BF99-496175D899C1}"/>
+                <a16:creationId xmlns:a16="http://schemas.microsoft.com/office/drawing/2014/main" id="{A941407A-77F2-4C40-828E-EAEEA183DAEC}"/>
               </a:ext>
             </a:extLst>
           </p:cNvPr>
@@ -13543,7 +13551,7 @@
           <p:cNvPr id="11" name="">
             <a:extLst xmlns:a="http://schemas.openxmlformats.org/drawingml/2006/main">
               <a:ext uri="{FF2B5EF4-FFF2-40B4-BE49-F238E27FC236}">
-                <a16:creationId xmlns:a16="http://schemas.microsoft.com/office/drawing/2014/main" id="{0E4E9F62-9E2D-4663-96D5-5B102A48AF50}"/>
+                <a16:creationId xmlns:a16="http://schemas.microsoft.com/office/drawing/2014/main" id="{C4BB11D3-A55F-4ACD-81ED-810C5248DFFA}"/>
               </a:ext>
             </a:extLst>
           </p:cNvPr>
@@ -13575,7 +13583,7 @@
           <p:cNvPr id="12" name="">
             <a:extLst xmlns:a="http://schemas.openxmlformats.org/drawingml/2006/main">
               <a:ext uri="{FF2B5EF4-FFF2-40B4-BE49-F238E27FC236}">
-                <a16:creationId xmlns:a16="http://schemas.microsoft.com/office/drawing/2014/main" id="{0C1687AC-4E28-4C9E-B789-CE319B8C1B5D}"/>
+                <a16:creationId xmlns:a16="http://schemas.microsoft.com/office/drawing/2014/main" id="{AFD4B440-5B84-47F0-AABD-AFD561ED7EDB}"/>
               </a:ext>
             </a:extLst>
           </p:cNvPr>
@@ -13632,7 +13640,7 @@
           <p:cNvPr id="13" name="">
             <a:extLst xmlns:a="http://schemas.openxmlformats.org/drawingml/2006/main">
               <a:ext uri="{FF2B5EF4-FFF2-40B4-BE49-F238E27FC236}">
-                <a16:creationId xmlns:a16="http://schemas.microsoft.com/office/drawing/2014/main" id="{41F402EE-9C93-42EC-BA2E-D750F5D23753}"/>
+                <a16:creationId xmlns:a16="http://schemas.microsoft.com/office/drawing/2014/main" id="{D7684FB6-33D1-47C6-B4C6-E01BCB6C5E6C}"/>
               </a:ext>
             </a:extLst>
           </p:cNvPr>
@@ -13689,7 +13697,7 @@
           <p:cNvPr id="14" name="">
             <a:extLst xmlns:a="http://schemas.openxmlformats.org/drawingml/2006/main">
               <a:ext uri="{FF2B5EF4-FFF2-40B4-BE49-F238E27FC236}">
-                <a16:creationId xmlns:a16="http://schemas.microsoft.com/office/drawing/2014/main" id="{7200843C-A734-401A-BE5B-1D023D89B4CC}"/>
+                <a16:creationId xmlns:a16="http://schemas.microsoft.com/office/drawing/2014/main" id="{13700BF3-CD9C-4417-91A7-4BCFB077157F}"/>
               </a:ext>
             </a:extLst>
           </p:cNvPr>
@@ -13723,7 +13731,7 @@
           <p:cNvPr id="15" name="">
             <a:extLst xmlns:a="http://schemas.openxmlformats.org/drawingml/2006/main">
               <a:ext uri="{FF2B5EF4-FFF2-40B4-BE49-F238E27FC236}">
-                <a16:creationId xmlns:a16="http://schemas.microsoft.com/office/drawing/2014/main" id="{F5AC697A-9925-48B8-90C9-9BD5F48EC02C}"/>
+                <a16:creationId xmlns:a16="http://schemas.microsoft.com/office/drawing/2014/main" id="{E9966F7C-C358-44B5-82ED-00D94AD19FC9}"/>
               </a:ext>
             </a:extLst>
           </p:cNvPr>
@@ -13755,7 +13763,7 @@
           <p:cNvPr id="16" name="">
             <a:extLst xmlns:a="http://schemas.openxmlformats.org/drawingml/2006/main">
               <a:ext uri="{FF2B5EF4-FFF2-40B4-BE49-F238E27FC236}">
-                <a16:creationId xmlns:a16="http://schemas.microsoft.com/office/drawing/2014/main" id="{730422DD-85B7-4BAC-860C-88D96F2040C8}"/>
+                <a16:creationId xmlns:a16="http://schemas.microsoft.com/office/drawing/2014/main" id="{BFA29742-D531-4BE8-8062-1C89950FAB6C}"/>
               </a:ext>
             </a:extLst>
           </p:cNvPr>
@@ -13812,7 +13820,7 @@
           <p:cNvPr id="17" name="">
             <a:extLst xmlns:a="http://schemas.openxmlformats.org/drawingml/2006/main">
               <a:ext uri="{FF2B5EF4-FFF2-40B4-BE49-F238E27FC236}">
-                <a16:creationId xmlns:a16="http://schemas.microsoft.com/office/drawing/2014/main" id="{BA4B3B33-475F-4793-BFA3-661DDCC1AD4A}"/>
+                <a16:creationId xmlns:a16="http://schemas.microsoft.com/office/drawing/2014/main" id="{E1014B37-F709-4E4A-8152-086A47D7A729}"/>
               </a:ext>
             </a:extLst>
           </p:cNvPr>
@@ -13869,7 +13877,7 @@
           <p:cNvPr id="18" name="">
             <a:extLst xmlns:a="http://schemas.openxmlformats.org/drawingml/2006/main">
               <a:ext uri="{FF2B5EF4-FFF2-40B4-BE49-F238E27FC236}">
-                <a16:creationId xmlns:a16="http://schemas.microsoft.com/office/drawing/2014/main" id="{879F7AF7-FDE9-4216-AB0E-78F269593377}"/>
+                <a16:creationId xmlns:a16="http://schemas.microsoft.com/office/drawing/2014/main" id="{9592A341-3788-4CD0-9281-66FE802E4B01}"/>
               </a:ext>
             </a:extLst>
           </p:cNvPr>
@@ -13903,7 +13911,7 @@
           <p:cNvPr id="19" name="">
             <a:extLst xmlns:a="http://schemas.openxmlformats.org/drawingml/2006/main">
               <a:ext uri="{FF2B5EF4-FFF2-40B4-BE49-F238E27FC236}">
-                <a16:creationId xmlns:a16="http://schemas.microsoft.com/office/drawing/2014/main" id="{291255DC-1072-46FA-B915-24FCDFED9D39}"/>
+                <a16:creationId xmlns:a16="http://schemas.microsoft.com/office/drawing/2014/main" id="{B64867C6-B5AF-49A0-895A-163F13AFE792}"/>
               </a:ext>
             </a:extLst>
           </p:cNvPr>
@@ -13935,7 +13943,7 @@
           <p:cNvPr id="20" name="">
             <a:extLst xmlns:a="http://schemas.openxmlformats.org/drawingml/2006/main">
               <a:ext uri="{FF2B5EF4-FFF2-40B4-BE49-F238E27FC236}">
-                <a16:creationId xmlns:a16="http://schemas.microsoft.com/office/drawing/2014/main" id="{A27C0152-CD69-4FA5-BA03-3F7CBC7F6239}"/>
+                <a16:creationId xmlns:a16="http://schemas.microsoft.com/office/drawing/2014/main" id="{EB03D7D0-54B1-47BB-92B3-E5B2F916C164}"/>
               </a:ext>
             </a:extLst>
           </p:cNvPr>
@@ -13992,7 +14000,7 @@
           <p:cNvPr id="21" name="">
             <a:extLst xmlns:a="http://schemas.openxmlformats.org/drawingml/2006/main">
               <a:ext uri="{FF2B5EF4-FFF2-40B4-BE49-F238E27FC236}">
-                <a16:creationId xmlns:a16="http://schemas.microsoft.com/office/drawing/2014/main" id="{026069F0-E1FD-48BC-9B00-BFDD4D1694EF}"/>
+                <a16:creationId xmlns:a16="http://schemas.microsoft.com/office/drawing/2014/main" id="{A90E1494-B367-4FCE-9B96-6D0ADF7C9751}"/>
               </a:ext>
             </a:extLst>
           </p:cNvPr>
@@ -14047,7 +14055,7 @@
     </p:spTree>
     <p:extLst>
       <p:ext uri="{BB962C8B-B14F-4D97-AF65-F5344CB8AC3E}">
-        <p14:creationId xmlns:p14="http://schemas.microsoft.com/office/powerpoint/2010/main" val="136347228"/>
+        <p14:creationId xmlns:p14="http://schemas.microsoft.com/office/powerpoint/2010/main" val="341575821"/>
       </p:ext>
     </p:extLst>
   </p:cSld>
